--- a/public/sample.pptx
+++ b/public/sample.pptx
@@ -8,6 +8,11 @@
     <p:sldId id="256" r:id="rId2"/>
     <p:sldId id="257" r:id="rId3"/>
     <p:sldId id="258" r:id="rId4"/>
+    <p:sldId id="259" r:id="rIdPractice4"/>
+    <p:sldId id="260" r:id="rIdPractice5"/>
+    <p:sldId id="261" r:id="rIdPractice6"/>
+    <p:sldId id="262" r:id="rIdPractice7"/>
+    <p:sldId id="263" r:id="rIdPractice8"/>
   </p:sldIdLst>
   <p:notesMasterIdLst>
     <p:notesMasterId r:id="rId5"/>
@@ -1351,7 +1356,7 @@
                   <a:srgbClr val="67758D"/>
                 </a:solidFill>
               </a:rPr>
-              <a:t>① 왼쪽에서 적용할 슬라이드를 선택</a:t>
+              <a:t>① 왼쪽 번호에 1-3 입력 → 적용</a:t>
             </a:r>
             <a:endParaRPr lang="en-US" sz="1400" dirty="0"/>
           </a:p>
@@ -1365,7 +1370,7 @@
                   <a:srgbClr val="67758D"/>
                 </a:solidFill>
               </a:rPr>
-              <a:t>② 숫자 위를 클릭하면 함께 선택</a:t>
+              <a:t>② 숫자 클릭 → 세 장에서 함께 선택</a:t>
             </a:r>
             <a:endParaRPr lang="en-US" sz="1400" dirty="0"/>
           </a:p>
@@ -1379,7 +1384,7 @@
                   <a:srgbClr val="67758D"/>
                 </a:solidFill>
               </a:rPr>
-              <a:t>③ 오른쪽에서 X · Y를 입력하고 이동</a:t>
+              <a:t>③ X·Y 이동 후 마지막 변경 취소</a:t>
             </a:r>
             <a:endParaRPr lang="en-US" sz="1400" dirty="0"/>
           </a:p>
@@ -1418,6 +1423,96 @@
               <a:t>01</a:t>
             </a:r>
             <a:endParaRPr lang="en-US" sz="1200" dirty="0"/>
+          </a:p>
+        </p:txBody>
+      </p:sp>
+      <p:sp xmlns:a="http://schemas.openxmlformats.org/drawingml/2006/main" xmlns:p="http://schemas.openxmlformats.org/presentationml/2006/main">
+        <p:nvSpPr>
+          <p:cNvPr id="31" name="추가 실습 안내"/>
+          <p:cNvSpPr txBox="1"/>
+          <p:nvPr/>
+        </p:nvSpPr>
+        <p:spPr>
+          <a:xfrm>
+            <a:off x="720000" y="5076000"/>
+            <a:ext cx="10800000" cy="432000"/>
+          </a:xfrm>
+          <a:prstGeom prst="rect">
+            <a:avLst/>
+          </a:prstGeom>
+          <a:noFill/>
+          <a:ln>
+            <a:noFill/>
+          </a:ln>
+        </p:spPr>
+        <p:txBody>
+          <a:bodyPr wrap="square" lIns="54000" tIns="36000" rIns="54000" bIns="36000" anchor="t">
+            <a:noAutofit/>
+          </a:bodyPr>
+          <a:lstStyle/>
+          <a:p>
+            <a:pPr>
+              <a:lnSpc>
+                <a:spcPct val="120000"/>
+              </a:lnSpc>
+              <a:buNone/>
+            </a:pPr>
+            <a:r>
+              <a:rPr lang="ko-KR" sz="1300" b="0">
+                <a:solidFill>
+                  <a:srgbClr val="536C9C"/>
+                </a:solidFill>
+                <a:latin typeface="Arial"/>
+                <a:ea typeface="맑은 고딕"/>
+              </a:rPr>
+              <a:t>검색 연습: 왼쪽 선택 해제 → “매출” 검색 → 일치 선택 / Shift+Enter로 해제</a:t>
+            </a:r>
+            <a:endParaRPr lang="ko-KR" sz="1300"/>
+          </a:p>
+        </p:txBody>
+      </p:sp>
+      <p:sp xmlns:a="http://schemas.openxmlformats.org/drawingml/2006/main" xmlns:p="http://schemas.openxmlformats.org/presentationml/2006/main">
+        <p:nvSpPr>
+          <p:cNvPr id="32" name="다음 실습"/>
+          <p:cNvSpPr txBox="1"/>
+          <p:nvPr/>
+        </p:nvSpPr>
+        <p:spPr>
+          <a:xfrm>
+            <a:off x="720000" y="5652000"/>
+            <a:ext cx="10440000" cy="360000"/>
+          </a:xfrm>
+          <a:prstGeom prst="rect">
+            <a:avLst/>
+          </a:prstGeom>
+          <a:noFill/>
+          <a:ln>
+            <a:noFill/>
+          </a:ln>
+        </p:spPr>
+        <p:txBody>
+          <a:bodyPr wrap="square" lIns="54000" tIns="36000" rIns="54000" bIns="36000" anchor="t">
+            <a:noAutofit/>
+          </a:bodyPr>
+          <a:lstStyle/>
+          <a:p>
+            <a:pPr>
+              <a:lnSpc>
+                <a:spcPct val="120000"/>
+              </a:lnSpc>
+              <a:buNone/>
+            </a:pPr>
+            <a:r>
+              <a:rPr lang="ko-KR" sz="1200" b="0">
+                <a:solidFill>
+                  <a:srgbClr val="71809A"/>
+                </a:solidFill>
+                <a:latin typeface="Arial"/>
+                <a:ea typeface="맑은 고딕"/>
+              </a:rPr>
+              <a:t>4 정렬·간격  /  5 높이 맞춤  /  6 안내선  /  7 그룹·선택  /  8 삭제·저장</a:t>
+            </a:r>
+            <a:endParaRPr lang="ko-KR" sz="1200"/>
           </a:p>
         </p:txBody>
       </p:sp>
@@ -1751,7 +1846,7 @@
                   <a:srgbClr val="67758D"/>
                 </a:solidFill>
               </a:rPr>
-              <a:t>① 왼쪽에서 적용할 슬라이드를 선택</a:t>
+              <a:t>① 왼쪽 번호에 1-3 입력 → 적용</a:t>
             </a:r>
             <a:endParaRPr lang="en-US" sz="1400" dirty="0"/>
           </a:p>
@@ -1765,7 +1860,7 @@
                   <a:srgbClr val="67758D"/>
                 </a:solidFill>
               </a:rPr>
-              <a:t>② 숫자 위를 클릭하면 함께 선택</a:t>
+              <a:t>② 숫자 클릭 → 세 장에서 함께 선택</a:t>
             </a:r>
             <a:endParaRPr lang="en-US" sz="1400" dirty="0"/>
           </a:p>
@@ -1779,7 +1874,7 @@
                   <a:srgbClr val="67758D"/>
                 </a:solidFill>
               </a:rPr>
-              <a:t>③ 오른쪽에서 X · Y를 입력하고 이동</a:t>
+              <a:t>③ X·Y 이동 후 마지막 변경 취소</a:t>
             </a:r>
             <a:endParaRPr lang="en-US" sz="1400" dirty="0"/>
           </a:p>
@@ -1818,6 +1913,96 @@
               <a:t>02</a:t>
             </a:r>
             <a:endParaRPr lang="en-US" sz="1200" dirty="0"/>
+          </a:p>
+        </p:txBody>
+      </p:sp>
+      <p:sp xmlns:a="http://schemas.openxmlformats.org/drawingml/2006/main" xmlns:p="http://schemas.openxmlformats.org/presentationml/2006/main">
+        <p:nvSpPr>
+          <p:cNvPr id="31" name="추가 실습 안내"/>
+          <p:cNvSpPr txBox="1"/>
+          <p:nvPr/>
+        </p:nvSpPr>
+        <p:spPr>
+          <a:xfrm>
+            <a:off x="720000" y="5076000"/>
+            <a:ext cx="10800000" cy="432000"/>
+          </a:xfrm>
+          <a:prstGeom prst="rect">
+            <a:avLst/>
+          </a:prstGeom>
+          <a:noFill/>
+          <a:ln>
+            <a:noFill/>
+          </a:ln>
+        </p:spPr>
+        <p:txBody>
+          <a:bodyPr wrap="square" lIns="54000" tIns="36000" rIns="54000" bIns="36000" anchor="t">
+            <a:noAutofit/>
+          </a:bodyPr>
+          <a:lstStyle/>
+          <a:p>
+            <a:pPr>
+              <a:lnSpc>
+                <a:spcPct val="120000"/>
+              </a:lnSpc>
+              <a:buNone/>
+            </a:pPr>
+            <a:r>
+              <a:rPr lang="ko-KR" sz="1300" b="0">
+                <a:solidFill>
+                  <a:srgbClr val="536C9C"/>
+                </a:solidFill>
+                <a:latin typeface="Arial"/>
+                <a:ea typeface="맑은 고딕"/>
+              </a:rPr>
+              <a:t>요소 검색: 1-3 적용 → Text와 5를 한 칸 띄어 검색 → Enter / Shift+Enter로 해제</a:t>
+            </a:r>
+            <a:endParaRPr lang="ko-KR" sz="1300"/>
+          </a:p>
+        </p:txBody>
+      </p:sp>
+      <p:sp xmlns:a="http://schemas.openxmlformats.org/drawingml/2006/main" xmlns:p="http://schemas.openxmlformats.org/presentationml/2006/main">
+        <p:nvSpPr>
+          <p:cNvPr id="32" name="다음 실습"/>
+          <p:cNvSpPr txBox="1"/>
+          <p:nvPr/>
+        </p:nvSpPr>
+        <p:spPr>
+          <a:xfrm>
+            <a:off x="720000" y="5652000"/>
+            <a:ext cx="10440000" cy="360000"/>
+          </a:xfrm>
+          <a:prstGeom prst="rect">
+            <a:avLst/>
+          </a:prstGeom>
+          <a:noFill/>
+          <a:ln>
+            <a:noFill/>
+          </a:ln>
+        </p:spPr>
+        <p:txBody>
+          <a:bodyPr wrap="square" lIns="54000" tIns="36000" rIns="54000" bIns="36000" anchor="t">
+            <a:noAutofit/>
+          </a:bodyPr>
+          <a:lstStyle/>
+          <a:p>
+            <a:pPr>
+              <a:lnSpc>
+                <a:spcPct val="120000"/>
+              </a:lnSpc>
+              <a:buNone/>
+            </a:pPr>
+            <a:r>
+              <a:rPr lang="ko-KR" sz="1200" b="0">
+                <a:solidFill>
+                  <a:srgbClr val="71809A"/>
+                </a:solidFill>
+                <a:latin typeface="Arial"/>
+                <a:ea typeface="맑은 고딕"/>
+              </a:rPr>
+              <a:t>4 정렬·간격  /  5 높이 맞춤  /  6 안내선  /  7 그룹·선택  /  8 삭제·저장</a:t>
+            </a:r>
+            <a:endParaRPr lang="ko-KR" sz="1200"/>
           </a:p>
         </p:txBody>
       </p:sp>
@@ -2151,7 +2336,7 @@
                   <a:srgbClr val="67758D"/>
                 </a:solidFill>
               </a:rPr>
-              <a:t>① 왼쪽에서 적용할 슬라이드를 선택</a:t>
+              <a:t>① 왼쪽 번호에 1-3 입력 → 적용</a:t>
             </a:r>
             <a:endParaRPr lang="en-US" sz="1400" dirty="0"/>
           </a:p>
@@ -2165,7 +2350,7 @@
                   <a:srgbClr val="67758D"/>
                 </a:solidFill>
               </a:rPr>
-              <a:t>② 숫자 위를 클릭하면 함께 선택</a:t>
+              <a:t>② 숫자 클릭 → 세 장에서 함께 선택</a:t>
             </a:r>
             <a:endParaRPr lang="en-US" sz="1400" dirty="0"/>
           </a:p>
@@ -2179,7 +2364,7 @@
                   <a:srgbClr val="67758D"/>
                 </a:solidFill>
               </a:rPr>
-              <a:t>③ 오른쪽에서 X · Y를 입력하고 이동</a:t>
+              <a:t>③ X·Y 이동 후 마지막 변경 취소</a:t>
             </a:r>
             <a:endParaRPr lang="en-US" sz="1400" dirty="0"/>
           </a:p>
@@ -2218,6 +2403,3987 @@
               <a:t>03</a:t>
             </a:r>
             <a:endParaRPr lang="en-US" sz="1200" dirty="0"/>
+          </a:p>
+        </p:txBody>
+      </p:sp>
+      <p:sp xmlns:a="http://schemas.openxmlformats.org/drawingml/2006/main" xmlns:p="http://schemas.openxmlformats.org/presentationml/2006/main">
+        <p:nvSpPr>
+          <p:cNvPr id="31" name="추가 실습 안내"/>
+          <p:cNvSpPr txBox="1"/>
+          <p:nvPr/>
+        </p:nvSpPr>
+        <p:spPr>
+          <a:xfrm>
+            <a:off x="720000" y="5076000"/>
+            <a:ext cx="10800000" cy="432000"/>
+          </a:xfrm>
+          <a:prstGeom prst="rect">
+            <a:avLst/>
+          </a:prstGeom>
+          <a:noFill/>
+          <a:ln>
+            <a:noFill/>
+          </a:ln>
+        </p:spPr>
+        <p:txBody>
+          <a:bodyPr wrap="square" lIns="54000" tIns="36000" rIns="54000" bIns="36000" anchor="t">
+            <a:noAutofit/>
+          </a:bodyPr>
+          <a:lstStyle/>
+          <a:p>
+            <a:pPr>
+              <a:lnSpc>
+                <a:spcPct val="120000"/>
+              </a:lnSpc>
+              <a:buNone/>
+            </a:pPr>
+            <a:r>
+              <a:rPr lang="ko-KR" sz="1300" b="0">
+                <a:solidFill>
+                  <a:srgbClr val="536C9C"/>
+                </a:solidFill>
+                <a:latin typeface="Arial"/>
+                <a:ea typeface="맑은 고딕"/>
+              </a:rPr>
+              <a:t>동시 편집: 1-3 적용 → 제목 클릭 → 슬라이드 전체 기준 가운데 정렬</a:t>
+            </a:r>
+            <a:endParaRPr lang="ko-KR" sz="1300"/>
+          </a:p>
+        </p:txBody>
+      </p:sp>
+      <p:sp xmlns:a="http://schemas.openxmlformats.org/drawingml/2006/main" xmlns:p="http://schemas.openxmlformats.org/presentationml/2006/main">
+        <p:nvSpPr>
+          <p:cNvPr id="32" name="다음 실습"/>
+          <p:cNvSpPr txBox="1"/>
+          <p:nvPr/>
+        </p:nvSpPr>
+        <p:spPr>
+          <a:xfrm>
+            <a:off x="720000" y="5652000"/>
+            <a:ext cx="10440000" cy="360000"/>
+          </a:xfrm>
+          <a:prstGeom prst="rect">
+            <a:avLst/>
+          </a:prstGeom>
+          <a:noFill/>
+          <a:ln>
+            <a:noFill/>
+          </a:ln>
+        </p:spPr>
+        <p:txBody>
+          <a:bodyPr wrap="square" lIns="54000" tIns="36000" rIns="54000" bIns="36000" anchor="t">
+            <a:noAutofit/>
+          </a:bodyPr>
+          <a:lstStyle/>
+          <a:p>
+            <a:pPr>
+              <a:lnSpc>
+                <a:spcPct val="120000"/>
+              </a:lnSpc>
+              <a:buNone/>
+            </a:pPr>
+            <a:r>
+              <a:rPr lang="ko-KR" sz="1200" b="0">
+                <a:solidFill>
+                  <a:srgbClr val="71809A"/>
+                </a:solidFill>
+                <a:latin typeface="Arial"/>
+                <a:ea typeface="맑은 고딕"/>
+              </a:rPr>
+              <a:t>4 정렬·간격  /  5 높이 맞춤  /  6 안내선  /  7 그룹·선택  /  8 삭제·저장</a:t>
+            </a:r>
+            <a:endParaRPr lang="ko-KR" sz="1200"/>
+          </a:p>
+        </p:txBody>
+      </p:sp>
+    </p:spTree>
+  </p:cSld>
+  <p:clrMapOvr>
+    <a:masterClrMapping/>
+  </p:clrMapOvr>
+</p:sld>
+</file>
+
+<file path=ppt/slides/slide4.xml><?xml version="1.0" encoding="utf-8"?>
+<p:sld xmlns:p="http://schemas.openxmlformats.org/presentationml/2006/main" xmlns:a="http://schemas.openxmlformats.org/drawingml/2006/main" xmlns:r="http://schemas.openxmlformats.org/officeDocument/2006/relationships">
+  <p:cSld name="정렬과 간격 균등">
+    <p:bg>
+      <p:bgPr>
+        <a:solidFill>
+          <a:srgbClr val="F5F7FC"/>
+        </a:solidFill>
+        <a:effectLst/>
+      </p:bgPr>
+    </p:bg>
+    <p:spTree>
+      <p:nvGrpSpPr>
+        <p:cNvPr id="1" name=""/>
+        <p:cNvGrpSpPr/>
+        <p:nvPr/>
+      </p:nvGrpSpPr>
+      <p:grpSpPr/>
+      <p:sp>
+        <p:nvSpPr>
+          <p:cNvPr id="2" name="상단 띠"/>
+          <p:cNvSpPr txBox="0"/>
+          <p:nvPr/>
+        </p:nvSpPr>
+        <p:spPr>
+          <a:xfrm>
+            <a:off x="0" y="0"/>
+            <a:ext cx="12192012" cy="108000"/>
+          </a:xfrm>
+          <a:prstGeom prst="rect">
+            <a:avLst/>
+          </a:prstGeom>
+          <a:solidFill>
+            <a:srgbClr val="4268D6"/>
+          </a:solidFill>
+          <a:ln>
+            <a:noFill/>
+          </a:ln>
+        </p:spPr>
+      </p:sp>
+      <p:sp>
+        <p:nvSpPr>
+          <p:cNvPr id="3" name="단원"/>
+          <p:cNvSpPr txBox="1"/>
+          <p:nvPr/>
+        </p:nvSpPr>
+        <p:spPr>
+          <a:xfrm>
+            <a:off x="720000" y="360000"/>
+            <a:ext cx="10440000" cy="252000"/>
+          </a:xfrm>
+          <a:prstGeom prst="rect">
+            <a:avLst/>
+          </a:prstGeom>
+          <a:noFill/>
+          <a:ln>
+            <a:noFill/>
+          </a:ln>
+        </p:spPr>
+        <p:txBody>
+          <a:bodyPr wrap="square" lIns="54000" tIns="36000" rIns="54000" bIns="36000" anchor="t">
+            <a:noAutofit/>
+          </a:bodyPr>
+          <a:lstStyle/>
+          <a:p>
+            <a:pPr>
+              <a:lnSpc>
+                <a:spcPct val="120000"/>
+              </a:lnSpc>
+              <a:buNone/>
+            </a:pPr>
+            <a:r>
+              <a:rPr lang="ko-KR" sz="1100" b="0">
+                <a:solidFill>
+                  <a:srgbClr val="71809A"/>
+                </a:solidFill>
+                <a:latin typeface="Arial"/>
+                <a:ea typeface="맑은 고딕"/>
+              </a:rPr>
+              <a:t>SLIDE SYNC  /  PRACTICE</a:t>
+            </a:r>
+            <a:endParaRPr lang="ko-KR" sz="1100"/>
+          </a:p>
+        </p:txBody>
+      </p:sp>
+      <p:sp>
+        <p:nvSpPr>
+          <p:cNvPr id="4" name="Text 2"/>
+          <p:cNvSpPr txBox="1"/>
+          <p:nvPr/>
+        </p:nvSpPr>
+        <p:spPr>
+          <a:xfrm>
+            <a:off x="720000" y="828000"/>
+            <a:ext cx="10800000" cy="540000"/>
+          </a:xfrm>
+          <a:prstGeom prst="rect">
+            <a:avLst/>
+          </a:prstGeom>
+          <a:noFill/>
+          <a:ln>
+            <a:noFill/>
+          </a:ln>
+        </p:spPr>
+        <p:txBody>
+          <a:bodyPr wrap="square" lIns="54000" tIns="36000" rIns="54000" bIns="36000" anchor="t">
+            <a:noAutofit/>
+          </a:bodyPr>
+          <a:lstStyle/>
+          <a:p>
+            <a:pPr>
+              <a:lnSpc>
+                <a:spcPct val="120000"/>
+              </a:lnSpc>
+              <a:buNone/>
+            </a:pPr>
+            <a:r>
+              <a:rPr lang="ko-KR" sz="2800" b="1">
+                <a:solidFill>
+                  <a:srgbClr val="263346"/>
+                </a:solidFill>
+                <a:latin typeface="Arial"/>
+                <a:ea typeface="맑은 고딕"/>
+              </a:rPr>
+              <a:t>정렬과 간격 균등</a:t>
+            </a:r>
+            <a:endParaRPr lang="ko-KR" sz="2800"/>
+          </a:p>
+        </p:txBody>
+      </p:sp>
+      <p:sp>
+        <p:nvSpPr>
+          <p:cNvPr id="5" name="부제"/>
+          <p:cNvSpPr txBox="1"/>
+          <p:nvPr/>
+        </p:nvSpPr>
+        <p:spPr>
+          <a:xfrm>
+            <a:off x="720000" y="1476000"/>
+            <a:ext cx="10800000" cy="432000"/>
+          </a:xfrm>
+          <a:prstGeom prst="rect">
+            <a:avLst/>
+          </a:prstGeom>
+          <a:noFill/>
+          <a:ln>
+            <a:noFill/>
+          </a:ln>
+        </p:spPr>
+        <p:txBody>
+          <a:bodyPr wrap="square" lIns="54000" tIns="36000" rIns="54000" bIns="36000" anchor="t">
+            <a:noAutofit/>
+          </a:bodyPr>
+          <a:lstStyle/>
+          <a:p>
+            <a:pPr>
+              <a:lnSpc>
+                <a:spcPct val="120000"/>
+              </a:lnSpc>
+              <a:buNone/>
+            </a:pPr>
+            <a:r>
+              <a:rPr lang="ko-KR" sz="1400" b="0">
+                <a:solidFill>
+                  <a:srgbClr val="67758D"/>
+                </a:solidFill>
+                <a:latin typeface="Arial"/>
+                <a:ea typeface="맑은 고딕"/>
+              </a:rPr>
+              <a:t>일부러 어긋난 카드의 경계와 간격을 맞춰 보세요.</a:t>
+            </a:r>
+            <a:endParaRPr lang="ko-KR" sz="1400"/>
+          </a:p>
+        </p:txBody>
+      </p:sp>
+      <p:sp>
+        <p:nvSpPr>
+          <p:cNvPr id="6" name="안내 패널"/>
+          <p:cNvSpPr txBox="0"/>
+          <p:nvPr/>
+        </p:nvSpPr>
+        <p:spPr>
+          <a:xfrm>
+            <a:off x="7308000" y="2160000"/>
+            <a:ext cx="4176000" cy="3888000"/>
+          </a:xfrm>
+          <a:prstGeom prst="rect">
+            <a:avLst/>
+          </a:prstGeom>
+          <a:solidFill>
+            <a:srgbClr val="E3EBFF"/>
+          </a:solidFill>
+          <a:ln>
+            <a:noFill/>
+          </a:ln>
+        </p:spPr>
+      </p:sp>
+      <p:sp>
+        <p:nvSpPr>
+          <p:cNvPr id="7" name="안내 제목"/>
+          <p:cNvSpPr txBox="1"/>
+          <p:nvPr/>
+        </p:nvSpPr>
+        <p:spPr>
+          <a:xfrm>
+            <a:off x="7560000" y="2376000"/>
+            <a:ext cx="3600000" cy="360000"/>
+          </a:xfrm>
+          <a:prstGeom prst="rect">
+            <a:avLst/>
+          </a:prstGeom>
+          <a:noFill/>
+          <a:ln>
+            <a:noFill/>
+          </a:ln>
+        </p:spPr>
+        <p:txBody>
+          <a:bodyPr wrap="square" lIns="54000" tIns="36000" rIns="54000" bIns="36000" anchor="t">
+            <a:noAutofit/>
+          </a:bodyPr>
+          <a:lstStyle/>
+          <a:p>
+            <a:pPr>
+              <a:lnSpc>
+                <a:spcPct val="120000"/>
+              </a:lnSpc>
+              <a:buNone/>
+            </a:pPr>
+            <a:r>
+              <a:rPr lang="ko-KR" sz="1800" b="1">
+                <a:solidFill>
+                  <a:srgbClr val="263346"/>
+                </a:solidFill>
+                <a:latin typeface="Arial"/>
+                <a:ea typeface="맑은 고딕"/>
+              </a:rPr>
+              <a:t>직접 해보기</a:t>
+            </a:r>
+            <a:endParaRPr lang="ko-KR" sz="1800"/>
+          </a:p>
+        </p:txBody>
+      </p:sp>
+      <p:sp>
+        <p:nvSpPr>
+          <p:cNvPr id="8" name="조작 안내"/>
+          <p:cNvSpPr txBox="1"/>
+          <p:nvPr/>
+        </p:nvSpPr>
+        <p:spPr>
+          <a:xfrm>
+            <a:off x="7560000" y="2844000"/>
+            <a:ext cx="3672000" cy="3060000"/>
+          </a:xfrm>
+          <a:prstGeom prst="rect">
+            <a:avLst/>
+          </a:prstGeom>
+          <a:noFill/>
+          <a:ln>
+            <a:noFill/>
+          </a:ln>
+        </p:spPr>
+        <p:txBody>
+          <a:bodyPr wrap="square" lIns="54000" tIns="36000" rIns="54000" bIns="36000" anchor="t">
+            <a:noAutofit/>
+          </a:bodyPr>
+          <a:lstStyle/>
+          <a:p>
+            <a:pPr>
+              <a:lnSpc>
+                <a:spcPct val="120000"/>
+              </a:lnSpc>
+              <a:buNone/>
+            </a:pPr>
+            <a:r>
+              <a:rPr lang="ko-KR" sz="1400" b="0">
+                <a:solidFill>
+                  <a:srgbClr val="536C9C"/>
+                </a:solidFill>
+                <a:latin typeface="Arial"/>
+                <a:ea typeface="맑은 고딕"/>
+              </a:rPr>
+              <a:t>① 오른쪽에서 가로 + 카드 붙여 검색</a:t>
+            </a:r>
+            <a:endParaRPr lang="ko-KR" sz="1400"/>
+          </a:p>
+          <a:p>
+            <a:pPr>
+              <a:lnSpc>
+                <a:spcPct val="120000"/>
+              </a:lnSpc>
+              <a:buNone/>
+            </a:pPr>
+            <a:r>
+              <a:rPr lang="ko-KR" sz="1400" b="0">
+                <a:solidFill>
+                  <a:srgbClr val="536C9C"/>
+                </a:solidFill>
+                <a:latin typeface="Arial"/>
+                <a:ea typeface="맑은 고딕"/>
+              </a:rPr>
+              <a:t>   Enter로 카드 3개 선택</a:t>
+            </a:r>
+            <a:endParaRPr lang="ko-KR" sz="1400"/>
+          </a:p>
+          <a:p>
+            <a:pPr>
+              <a:lnSpc>
+                <a:spcPct val="120000"/>
+              </a:lnSpc>
+              <a:buNone/>
+            </a:pPr>
+            <a:r>
+              <a:rPr lang="ko-KR" sz="1400" b="0">
+                <a:solidFill>
+                  <a:srgbClr val="536C9C"/>
+                </a:solidFill>
+                <a:latin typeface="Arial"/>
+                <a:ea typeface="맑은 고딕"/>
+              </a:rPr>
+              <a:t>② 기준: 선택한 요소들의 영역</a:t>
+            </a:r>
+            <a:endParaRPr lang="ko-KR" sz="1400"/>
+          </a:p>
+          <a:p>
+            <a:pPr>
+              <a:lnSpc>
+                <a:spcPct val="120000"/>
+              </a:lnSpc>
+              <a:buNone/>
+            </a:pPr>
+            <a:r>
+              <a:rPr lang="ko-KR" sz="1400" b="0">
+                <a:solidFill>
+                  <a:srgbClr val="536C9C"/>
+                </a:solidFill>
+                <a:latin typeface="Arial"/>
+                <a:ea typeface="맑은 고딕"/>
+              </a:rPr>
+              <a:t>   상단 → 가로 간격 균등</a:t>
+            </a:r>
+            <a:endParaRPr lang="ko-KR" sz="1400"/>
+          </a:p>
+          <a:p>
+            <a:pPr>
+              <a:lnSpc>
+                <a:spcPct val="120000"/>
+              </a:lnSpc>
+              <a:buNone/>
+            </a:pPr>
+            <a:r>
+              <a:rPr lang="ko-KR" sz="1400" b="0">
+                <a:solidFill>
+                  <a:srgbClr val="536C9C"/>
+                </a:solidFill>
+                <a:latin typeface="Arial"/>
+                <a:ea typeface="맑은 고딕"/>
+              </a:rPr>
+              <a:t>③ 마지막 변경 취소로 되돌린 뒤</a:t>
+            </a:r>
+            <a:endParaRPr lang="ko-KR" sz="1400"/>
+          </a:p>
+          <a:p>
+            <a:pPr>
+              <a:lnSpc>
+                <a:spcPct val="120000"/>
+              </a:lnSpc>
+              <a:buNone/>
+            </a:pPr>
+            <a:r>
+              <a:rPr lang="ko-KR" sz="1400" b="0">
+                <a:solidFill>
+                  <a:srgbClr val="536C9C"/>
+                </a:solidFill>
+                <a:latin typeface="Arial"/>
+                <a:ea typeface="맑은 고딕"/>
+              </a:rPr>
+              <a:t>   중단·하단도 각각 실행/취소</a:t>
+            </a:r>
+            <a:endParaRPr lang="ko-KR" sz="1400"/>
+          </a:p>
+          <a:p>
+            <a:pPr>
+              <a:lnSpc>
+                <a:spcPct val="120000"/>
+              </a:lnSpc>
+              <a:buNone/>
+            </a:pPr>
+            <a:r>
+              <a:rPr lang="ko-KR" sz="1400" b="0">
+                <a:solidFill>
+                  <a:srgbClr val="536C9C"/>
+                </a:solidFill>
+                <a:latin typeface="Arial"/>
+                <a:ea typeface="맑은 고딕"/>
+              </a:rPr>
+              <a:t>④ 비우기 → 세로 + 카드 붙여 검색</a:t>
+            </a:r>
+            <a:endParaRPr lang="ko-KR" sz="1400"/>
+          </a:p>
+          <a:p>
+            <a:pPr>
+              <a:lnSpc>
+                <a:spcPct val="120000"/>
+              </a:lnSpc>
+              <a:buNone/>
+            </a:pPr>
+            <a:r>
+              <a:rPr lang="ko-KR" sz="1400" b="0">
+                <a:solidFill>
+                  <a:srgbClr val="536C9C"/>
+                </a:solidFill>
+                <a:latin typeface="Arial"/>
+                <a:ea typeface="맑은 고딕"/>
+              </a:rPr>
+              <a:t>   왼쪽 → 세로 간격 균등</a:t>
+            </a:r>
+            <a:endParaRPr lang="ko-KR" sz="1400"/>
+          </a:p>
+          <a:p>
+            <a:pPr>
+              <a:lnSpc>
+                <a:spcPct val="120000"/>
+              </a:lnSpc>
+              <a:buNone/>
+            </a:pPr>
+            <a:r>
+              <a:rPr lang="ko-KR" sz="1400" b="0">
+                <a:solidFill>
+                  <a:srgbClr val="536C9C"/>
+                </a:solidFill>
+                <a:latin typeface="Arial"/>
+                <a:ea typeface="맑은 고딕"/>
+              </a:rPr>
+              <a:t>⑤ 가운데·오른쪽도 실행/취소</a:t>
+            </a:r>
+            <a:endParaRPr lang="ko-KR" sz="1400"/>
+          </a:p>
+          <a:p>
+            <a:pPr>
+              <a:lnSpc>
+                <a:spcPct val="120000"/>
+              </a:lnSpc>
+              <a:buNone/>
+            </a:pPr>
+            <a:r>
+              <a:rPr lang="ko-KR" sz="1400" b="0">
+                <a:solidFill>
+                  <a:srgbClr val="536C9C"/>
+                </a:solidFill>
+                <a:latin typeface="Arial"/>
+                <a:ea typeface="맑은 고딕"/>
+              </a:rPr>
+              <a:t>⑥ 카드 하나만 클릭한 뒤</a:t>
+            </a:r>
+            <a:endParaRPr lang="ko-KR" sz="1400"/>
+          </a:p>
+          <a:p>
+            <a:pPr>
+              <a:lnSpc>
+                <a:spcPct val="120000"/>
+              </a:lnSpc>
+              <a:buNone/>
+            </a:pPr>
+            <a:r>
+              <a:rPr lang="ko-KR" sz="1400" b="0">
+                <a:solidFill>
+                  <a:srgbClr val="536C9C"/>
+                </a:solidFill>
+                <a:latin typeface="Arial"/>
+                <a:ea typeface="맑은 고딕"/>
+              </a:rPr>
+              <a:t>   슬라이드 전체 기준도 체험</a:t>
+            </a:r>
+            <a:endParaRPr lang="ko-KR" sz="1400"/>
+          </a:p>
+        </p:txBody>
+      </p:sp>
+      <p:sp>
+        <p:nvSpPr>
+          <p:cNvPr id="9" name="공통 도움말"/>
+          <p:cNvSpPr txBox="1"/>
+          <p:nvPr/>
+        </p:nvSpPr>
+        <p:spPr>
+          <a:xfrm>
+            <a:off x="720000" y="6282000"/>
+            <a:ext cx="10080000" cy="288000"/>
+          </a:xfrm>
+          <a:prstGeom prst="rect">
+            <a:avLst/>
+          </a:prstGeom>
+          <a:noFill/>
+          <a:ln>
+            <a:noFill/>
+          </a:ln>
+        </p:spPr>
+        <p:txBody>
+          <a:bodyPr wrap="square" lIns="54000" tIns="36000" rIns="54000" bIns="36000" anchor="t">
+            <a:noAutofit/>
+          </a:bodyPr>
+          <a:lstStyle/>
+          <a:p>
+            <a:pPr>
+              <a:lnSpc>
+                <a:spcPct val="120000"/>
+              </a:lnSpc>
+              <a:buNone/>
+            </a:pPr>
+            <a:r>
+              <a:rPr lang="ko-KR" sz="1100" b="0">
+                <a:solidFill>
+                  <a:srgbClr val="71809A"/>
+                </a:solidFill>
+                <a:latin typeface="Arial"/>
+                <a:ea typeface="맑은 고딕"/>
+              </a:rPr>
+              <a:t>시작: 왼쪽 번호로 현재 장만 적용 → 오른쪽 선택 결과에서 비우기</a:t>
+            </a:r>
+            <a:endParaRPr lang="ko-KR" sz="1100"/>
+          </a:p>
+        </p:txBody>
+      </p:sp>
+      <p:sp>
+        <p:nvSpPr>
+          <p:cNvPr id="10" name="페이지"/>
+          <p:cNvSpPr txBox="1"/>
+          <p:nvPr/>
+        </p:nvSpPr>
+        <p:spPr>
+          <a:xfrm>
+            <a:off x="11160000" y="6282000"/>
+            <a:ext cx="360000" cy="288000"/>
+          </a:xfrm>
+          <a:prstGeom prst="rect">
+            <a:avLst/>
+          </a:prstGeom>
+          <a:noFill/>
+          <a:ln>
+            <a:noFill/>
+          </a:ln>
+        </p:spPr>
+        <p:txBody>
+          <a:bodyPr wrap="square" lIns="54000" tIns="36000" rIns="54000" bIns="36000" anchor="t">
+            <a:noAutofit/>
+          </a:bodyPr>
+          <a:lstStyle/>
+          <a:p>
+            <a:pPr>
+              <a:lnSpc>
+                <a:spcPct val="120000"/>
+              </a:lnSpc>
+              <a:buNone/>
+            </a:pPr>
+            <a:r>
+              <a:rPr lang="ko-KR" sz="1200" b="0">
+                <a:solidFill>
+                  <a:srgbClr val="8390A7"/>
+                </a:solidFill>
+                <a:latin typeface="Arial"/>
+                <a:ea typeface="맑은 고딕"/>
+              </a:rPr>
+              <a:t>04</a:t>
+            </a:r>
+            <a:endParaRPr lang="ko-KR" sz="1200"/>
+          </a:p>
+        </p:txBody>
+      </p:sp>
+      <p:sp>
+        <p:nvSpPr>
+          <p:cNvPr id="11" name="가로카드 1"/>
+          <p:cNvSpPr txBox="1"/>
+          <p:nvPr/>
+        </p:nvSpPr>
+        <p:spPr>
+          <a:xfrm>
+            <a:off x="720000" y="2484000"/>
+            <a:ext cx="1332000" cy="576000"/>
+          </a:xfrm>
+          <a:prstGeom prst="rect">
+            <a:avLst/>
+          </a:prstGeom>
+          <a:solidFill>
+            <a:srgbClr val="DCE7FF"/>
+          </a:solidFill>
+          <a:ln>
+            <a:noFill/>
+          </a:ln>
+        </p:spPr>
+        <p:txBody>
+          <a:bodyPr wrap="square" lIns="54000" tIns="36000" rIns="54000" bIns="36000" anchor="t">
+            <a:noAutofit/>
+          </a:bodyPr>
+          <a:lstStyle/>
+          <a:p>
+            <a:pPr>
+              <a:lnSpc>
+                <a:spcPct val="120000"/>
+              </a:lnSpc>
+              <a:buNone/>
+            </a:pPr>
+            <a:r>
+              <a:rPr lang="ko-KR" sz="1800" b="0">
+                <a:solidFill>
+                  <a:srgbClr val="263346"/>
+                </a:solidFill>
+                <a:latin typeface="Arial"/>
+                <a:ea typeface="맑은 고딕"/>
+              </a:rPr>
+              <a:t>카드 1</a:t>
+            </a:r>
+            <a:endParaRPr lang="ko-KR" sz="1800"/>
+          </a:p>
+        </p:txBody>
+      </p:sp>
+      <p:sp>
+        <p:nvSpPr>
+          <p:cNvPr id="12" name="가로카드 2"/>
+          <p:cNvSpPr txBox="1"/>
+          <p:nvPr/>
+        </p:nvSpPr>
+        <p:spPr>
+          <a:xfrm>
+            <a:off x="2340000" y="2736000"/>
+            <a:ext cx="1512000" cy="576000"/>
+          </a:xfrm>
+          <a:prstGeom prst="rect">
+            <a:avLst/>
+          </a:prstGeom>
+          <a:solidFill>
+            <a:srgbClr val="DCEFE8"/>
+          </a:solidFill>
+          <a:ln>
+            <a:noFill/>
+          </a:ln>
+        </p:spPr>
+        <p:txBody>
+          <a:bodyPr wrap="square" lIns="54000" tIns="36000" rIns="54000" bIns="36000" anchor="t">
+            <a:noAutofit/>
+          </a:bodyPr>
+          <a:lstStyle/>
+          <a:p>
+            <a:pPr>
+              <a:lnSpc>
+                <a:spcPct val="120000"/>
+              </a:lnSpc>
+              <a:buNone/>
+            </a:pPr>
+            <a:r>
+              <a:rPr lang="ko-KR" sz="1800" b="0">
+                <a:solidFill>
+                  <a:srgbClr val="263346"/>
+                </a:solidFill>
+                <a:latin typeface="Arial"/>
+                <a:ea typeface="맑은 고딕"/>
+              </a:rPr>
+              <a:t>카드 2</a:t>
+            </a:r>
+            <a:endParaRPr lang="ko-KR" sz="1800"/>
+          </a:p>
+        </p:txBody>
+      </p:sp>
+      <p:sp>
+        <p:nvSpPr>
+          <p:cNvPr id="13" name="가로카드 3"/>
+          <p:cNvSpPr txBox="1"/>
+          <p:nvPr/>
+        </p:nvSpPr>
+        <p:spPr>
+          <a:xfrm>
+            <a:off x="4752000" y="2304000"/>
+            <a:ext cx="1692000" cy="576000"/>
+          </a:xfrm>
+          <a:prstGeom prst="rect">
+            <a:avLst/>
+          </a:prstGeom>
+          <a:solidFill>
+            <a:srgbClr val="FFE9C9"/>
+          </a:solidFill>
+          <a:ln>
+            <a:noFill/>
+          </a:ln>
+        </p:spPr>
+        <p:txBody>
+          <a:bodyPr wrap="square" lIns="54000" tIns="36000" rIns="54000" bIns="36000" anchor="t">
+            <a:noAutofit/>
+          </a:bodyPr>
+          <a:lstStyle/>
+          <a:p>
+            <a:pPr>
+              <a:lnSpc>
+                <a:spcPct val="120000"/>
+              </a:lnSpc>
+              <a:buNone/>
+            </a:pPr>
+            <a:r>
+              <a:rPr lang="ko-KR" sz="1800" b="0">
+                <a:solidFill>
+                  <a:srgbClr val="263346"/>
+                </a:solidFill>
+                <a:latin typeface="Arial"/>
+                <a:ea typeface="맑은 고딕"/>
+              </a:rPr>
+              <a:t>카드 3</a:t>
+            </a:r>
+            <a:endParaRPr lang="ko-KR" sz="1800"/>
+          </a:p>
+        </p:txBody>
+      </p:sp>
+      <p:sp>
+        <p:nvSpPr>
+          <p:cNvPr id="14" name="세로카드 1"/>
+          <p:cNvSpPr txBox="1"/>
+          <p:nvPr/>
+        </p:nvSpPr>
+        <p:spPr>
+          <a:xfrm>
+            <a:off x="900000" y="3672000"/>
+            <a:ext cx="1800000" cy="432000"/>
+          </a:xfrm>
+          <a:prstGeom prst="rect">
+            <a:avLst/>
+          </a:prstGeom>
+          <a:solidFill>
+            <a:srgbClr val="DCE7FF"/>
+          </a:solidFill>
+          <a:ln>
+            <a:noFill/>
+          </a:ln>
+        </p:spPr>
+        <p:txBody>
+          <a:bodyPr wrap="square" lIns="54000" tIns="36000" rIns="54000" bIns="36000" anchor="t">
+            <a:noAutofit/>
+          </a:bodyPr>
+          <a:lstStyle/>
+          <a:p>
+            <a:pPr>
+              <a:lnSpc>
+                <a:spcPct val="120000"/>
+              </a:lnSpc>
+              <a:buNone/>
+            </a:pPr>
+            <a:r>
+              <a:rPr lang="ko-KR" sz="1600" b="0">
+                <a:solidFill>
+                  <a:srgbClr val="263346"/>
+                </a:solidFill>
+                <a:latin typeface="Arial"/>
+                <a:ea typeface="맑은 고딕"/>
+              </a:rPr>
+              <a:t>항목 1</a:t>
+            </a:r>
+            <a:endParaRPr lang="ko-KR" sz="1600"/>
+          </a:p>
+        </p:txBody>
+      </p:sp>
+      <p:sp>
+        <p:nvSpPr>
+          <p:cNvPr id="15" name="세로카드 2"/>
+          <p:cNvSpPr txBox="1"/>
+          <p:nvPr/>
+        </p:nvSpPr>
+        <p:spPr>
+          <a:xfrm>
+            <a:off x="1440000" y="4320000"/>
+            <a:ext cx="1800000" cy="432000"/>
+          </a:xfrm>
+          <a:prstGeom prst="rect">
+            <a:avLst/>
+          </a:prstGeom>
+          <a:solidFill>
+            <a:srgbClr val="DCE7FF"/>
+          </a:solidFill>
+          <a:ln>
+            <a:noFill/>
+          </a:ln>
+        </p:spPr>
+        <p:txBody>
+          <a:bodyPr wrap="square" lIns="54000" tIns="36000" rIns="54000" bIns="36000" anchor="t">
+            <a:noAutofit/>
+          </a:bodyPr>
+          <a:lstStyle/>
+          <a:p>
+            <a:pPr>
+              <a:lnSpc>
+                <a:spcPct val="120000"/>
+              </a:lnSpc>
+              <a:buNone/>
+            </a:pPr>
+            <a:r>
+              <a:rPr lang="ko-KR" sz="1600" b="0">
+                <a:solidFill>
+                  <a:srgbClr val="263346"/>
+                </a:solidFill>
+                <a:latin typeface="Arial"/>
+                <a:ea typeface="맑은 고딕"/>
+              </a:rPr>
+              <a:t>항목 2</a:t>
+            </a:r>
+            <a:endParaRPr lang="ko-KR" sz="1600"/>
+          </a:p>
+        </p:txBody>
+      </p:sp>
+      <p:sp>
+        <p:nvSpPr>
+          <p:cNvPr id="16" name="세로카드 3"/>
+          <p:cNvSpPr txBox="1"/>
+          <p:nvPr/>
+        </p:nvSpPr>
+        <p:spPr>
+          <a:xfrm>
+            <a:off x="1080000" y="5400000"/>
+            <a:ext cx="1800000" cy="432000"/>
+          </a:xfrm>
+          <a:prstGeom prst="rect">
+            <a:avLst/>
+          </a:prstGeom>
+          <a:solidFill>
+            <a:srgbClr val="DCE7FF"/>
+          </a:solidFill>
+          <a:ln>
+            <a:noFill/>
+          </a:ln>
+        </p:spPr>
+        <p:txBody>
+          <a:bodyPr wrap="square" lIns="54000" tIns="36000" rIns="54000" bIns="36000" anchor="t">
+            <a:noAutofit/>
+          </a:bodyPr>
+          <a:lstStyle/>
+          <a:p>
+            <a:pPr>
+              <a:lnSpc>
+                <a:spcPct val="120000"/>
+              </a:lnSpc>
+              <a:buNone/>
+            </a:pPr>
+            <a:r>
+              <a:rPr lang="ko-KR" sz="1600" b="0">
+                <a:solidFill>
+                  <a:srgbClr val="263346"/>
+                </a:solidFill>
+                <a:latin typeface="Arial"/>
+                <a:ea typeface="맑은 고딕"/>
+              </a:rPr>
+              <a:t>항목 3</a:t>
+            </a:r>
+            <a:endParaRPr lang="ko-KR" sz="1600"/>
+          </a:p>
+        </p:txBody>
+      </p:sp>
+    </p:spTree>
+  </p:cSld>
+  <p:clrMapOvr>
+    <a:masterClrMapping/>
+  </p:clrMapOvr>
+</p:sld>
+</file>
+
+<file path=ppt/slides/slide5.xml><?xml version="1.0" encoding="utf-8"?>
+<p:sld xmlns:p="http://schemas.openxmlformats.org/presentationml/2006/main" xmlns:a="http://schemas.openxmlformats.org/drawingml/2006/main" xmlns:r="http://schemas.openxmlformats.org/officeDocument/2006/relationships">
+  <p:cSld name="텍스트 상자 높이 맞춤">
+    <p:bg>
+      <p:bgPr>
+        <a:solidFill>
+          <a:srgbClr val="F5F7FC"/>
+        </a:solidFill>
+        <a:effectLst/>
+      </p:bgPr>
+    </p:bg>
+    <p:spTree>
+      <p:nvGrpSpPr>
+        <p:cNvPr id="1" name=""/>
+        <p:cNvGrpSpPr/>
+        <p:nvPr/>
+      </p:nvGrpSpPr>
+      <p:grpSpPr/>
+      <p:sp>
+        <p:nvSpPr>
+          <p:cNvPr id="2" name="상단 띠"/>
+          <p:cNvSpPr txBox="0"/>
+          <p:nvPr/>
+        </p:nvSpPr>
+        <p:spPr>
+          <a:xfrm>
+            <a:off x="0" y="0"/>
+            <a:ext cx="12192012" cy="108000"/>
+          </a:xfrm>
+          <a:prstGeom prst="rect">
+            <a:avLst/>
+          </a:prstGeom>
+          <a:solidFill>
+            <a:srgbClr val="4268D6"/>
+          </a:solidFill>
+          <a:ln>
+            <a:noFill/>
+          </a:ln>
+        </p:spPr>
+      </p:sp>
+      <p:sp>
+        <p:nvSpPr>
+          <p:cNvPr id="3" name="단원"/>
+          <p:cNvSpPr txBox="1"/>
+          <p:nvPr/>
+        </p:nvSpPr>
+        <p:spPr>
+          <a:xfrm>
+            <a:off x="720000" y="360000"/>
+            <a:ext cx="10440000" cy="252000"/>
+          </a:xfrm>
+          <a:prstGeom prst="rect">
+            <a:avLst/>
+          </a:prstGeom>
+          <a:noFill/>
+          <a:ln>
+            <a:noFill/>
+          </a:ln>
+        </p:spPr>
+        <p:txBody>
+          <a:bodyPr wrap="square" lIns="54000" tIns="36000" rIns="54000" bIns="36000" anchor="t">
+            <a:noAutofit/>
+          </a:bodyPr>
+          <a:lstStyle/>
+          <a:p>
+            <a:pPr>
+              <a:lnSpc>
+                <a:spcPct val="120000"/>
+              </a:lnSpc>
+              <a:buNone/>
+            </a:pPr>
+            <a:r>
+              <a:rPr lang="ko-KR" sz="1100" b="0">
+                <a:solidFill>
+                  <a:srgbClr val="71809A"/>
+                </a:solidFill>
+                <a:latin typeface="Arial"/>
+                <a:ea typeface="맑은 고딕"/>
+              </a:rPr>
+              <a:t>SLIDE SYNC  /  PRACTICE</a:t>
+            </a:r>
+            <a:endParaRPr lang="ko-KR" sz="1100"/>
+          </a:p>
+        </p:txBody>
+      </p:sp>
+      <p:sp>
+        <p:nvSpPr>
+          <p:cNvPr id="4" name="Text 2"/>
+          <p:cNvSpPr txBox="1"/>
+          <p:nvPr/>
+        </p:nvSpPr>
+        <p:spPr>
+          <a:xfrm>
+            <a:off x="720000" y="828000"/>
+            <a:ext cx="10800000" cy="540000"/>
+          </a:xfrm>
+          <a:prstGeom prst="rect">
+            <a:avLst/>
+          </a:prstGeom>
+          <a:noFill/>
+          <a:ln>
+            <a:noFill/>
+          </a:ln>
+        </p:spPr>
+        <p:txBody>
+          <a:bodyPr wrap="square" lIns="54000" tIns="36000" rIns="54000" bIns="36000" anchor="t">
+            <a:noAutofit/>
+          </a:bodyPr>
+          <a:lstStyle/>
+          <a:p>
+            <a:pPr>
+              <a:lnSpc>
+                <a:spcPct val="120000"/>
+              </a:lnSpc>
+              <a:buNone/>
+            </a:pPr>
+            <a:r>
+              <a:rPr lang="ko-KR" sz="2800" b="1">
+                <a:solidFill>
+                  <a:srgbClr val="263346"/>
+                </a:solidFill>
+                <a:latin typeface="Arial"/>
+                <a:ea typeface="맑은 고딕"/>
+              </a:rPr>
+              <a:t>텍스트 상자 높이 맞춤</a:t>
+            </a:r>
+            <a:endParaRPr lang="ko-KR" sz="2800"/>
+          </a:p>
+        </p:txBody>
+      </p:sp>
+      <p:sp>
+        <p:nvSpPr>
+          <p:cNvPr id="5" name="부제"/>
+          <p:cNvSpPr txBox="1"/>
+          <p:nvPr/>
+        </p:nvSpPr>
+        <p:spPr>
+          <a:xfrm>
+            <a:off x="720000" y="1476000"/>
+            <a:ext cx="10800000" cy="432000"/>
+          </a:xfrm>
+          <a:prstGeom prst="rect">
+            <a:avLst/>
+          </a:prstGeom>
+          <a:noFill/>
+          <a:ln>
+            <a:noFill/>
+          </a:ln>
+        </p:spPr>
+        <p:txBody>
+          <a:bodyPr wrap="square" lIns="54000" tIns="36000" rIns="54000" bIns="36000" anchor="t">
+            <a:noAutofit/>
+          </a:bodyPr>
+          <a:lstStyle/>
+          <a:p>
+            <a:pPr>
+              <a:lnSpc>
+                <a:spcPct val="120000"/>
+              </a:lnSpc>
+              <a:buNone/>
+            </a:pPr>
+            <a:r>
+              <a:rPr lang="ko-KR" sz="1400" b="0">
+                <a:solidFill>
+                  <a:srgbClr val="67758D"/>
+                </a:solidFill>
+                <a:latin typeface="Arial"/>
+                <a:ea typeface="맑은 고딕"/>
+              </a:rPr>
+              <a:t>짧은 상자는 늘어나고, 불필요하게 큰 상자는 줄어듭니다.</a:t>
+            </a:r>
+            <a:endParaRPr lang="ko-KR" sz="1400"/>
+          </a:p>
+        </p:txBody>
+      </p:sp>
+      <p:sp>
+        <p:nvSpPr>
+          <p:cNvPr id="6" name="안내 패널"/>
+          <p:cNvSpPr txBox="0"/>
+          <p:nvPr/>
+        </p:nvSpPr>
+        <p:spPr>
+          <a:xfrm>
+            <a:off x="7308000" y="2160000"/>
+            <a:ext cx="4176000" cy="3888000"/>
+          </a:xfrm>
+          <a:prstGeom prst="rect">
+            <a:avLst/>
+          </a:prstGeom>
+          <a:solidFill>
+            <a:srgbClr val="E3EBFF"/>
+          </a:solidFill>
+          <a:ln>
+            <a:noFill/>
+          </a:ln>
+        </p:spPr>
+      </p:sp>
+      <p:sp>
+        <p:nvSpPr>
+          <p:cNvPr id="7" name="안내 제목"/>
+          <p:cNvSpPr txBox="1"/>
+          <p:nvPr/>
+        </p:nvSpPr>
+        <p:spPr>
+          <a:xfrm>
+            <a:off x="7560000" y="2376000"/>
+            <a:ext cx="3600000" cy="360000"/>
+          </a:xfrm>
+          <a:prstGeom prst="rect">
+            <a:avLst/>
+          </a:prstGeom>
+          <a:noFill/>
+          <a:ln>
+            <a:noFill/>
+          </a:ln>
+        </p:spPr>
+        <p:txBody>
+          <a:bodyPr wrap="square" lIns="54000" tIns="36000" rIns="54000" bIns="36000" anchor="t">
+            <a:noAutofit/>
+          </a:bodyPr>
+          <a:lstStyle/>
+          <a:p>
+            <a:pPr>
+              <a:lnSpc>
+                <a:spcPct val="120000"/>
+              </a:lnSpc>
+              <a:buNone/>
+            </a:pPr>
+            <a:r>
+              <a:rPr lang="ko-KR" sz="1800" b="1">
+                <a:solidFill>
+                  <a:srgbClr val="263346"/>
+                </a:solidFill>
+                <a:latin typeface="Arial"/>
+                <a:ea typeface="맑은 고딕"/>
+              </a:rPr>
+              <a:t>직접 해보기</a:t>
+            </a:r>
+            <a:endParaRPr lang="ko-KR" sz="1800"/>
+          </a:p>
+        </p:txBody>
+      </p:sp>
+      <p:sp>
+        <p:nvSpPr>
+          <p:cNvPr id="8" name="조작 안내"/>
+          <p:cNvSpPr txBox="1"/>
+          <p:nvPr/>
+        </p:nvSpPr>
+        <p:spPr>
+          <a:xfrm>
+            <a:off x="7560000" y="2844000"/>
+            <a:ext cx="3672000" cy="3060000"/>
+          </a:xfrm>
+          <a:prstGeom prst="rect">
+            <a:avLst/>
+          </a:prstGeom>
+          <a:noFill/>
+          <a:ln>
+            <a:noFill/>
+          </a:ln>
+        </p:spPr>
+        <p:txBody>
+          <a:bodyPr wrap="square" lIns="54000" tIns="36000" rIns="54000" bIns="36000" anchor="t">
+            <a:noAutofit/>
+          </a:bodyPr>
+          <a:lstStyle/>
+          <a:p>
+            <a:pPr>
+              <a:lnSpc>
+                <a:spcPct val="120000"/>
+              </a:lnSpc>
+              <a:buNone/>
+            </a:pPr>
+            <a:r>
+              <a:rPr lang="ko-KR" sz="1400" b="0">
+                <a:solidFill>
+                  <a:srgbClr val="536C9C"/>
+                </a:solidFill>
+                <a:latin typeface="Arial"/>
+                <a:ea typeface="맑은 고딕"/>
+              </a:rPr>
+              <a:t>① 높이 + 실습 붙여 검색 → Enter</a:t>
+            </a:r>
+            <a:endParaRPr lang="ko-KR" sz="1400"/>
+          </a:p>
+          <a:p>
+            <a:pPr>
+              <a:lnSpc>
+                <a:spcPct val="120000"/>
+              </a:lnSpc>
+              <a:buNone/>
+            </a:pPr>
+            <a:r>
+              <a:rPr lang="ko-KR" sz="1400" b="0">
+                <a:solidFill>
+                  <a:srgbClr val="536C9C"/>
+                </a:solidFill>
+                <a:latin typeface="Arial"/>
+                <a:ea typeface="맑은 고딕"/>
+              </a:rPr>
+              <a:t>② 텍스트 상자 맞춤 펼치기</a:t>
+            </a:r>
+            <a:endParaRPr lang="ko-KR" sz="1400"/>
+          </a:p>
+          <a:p>
+            <a:pPr>
+              <a:lnSpc>
+                <a:spcPct val="120000"/>
+              </a:lnSpc>
+              <a:buNone/>
+            </a:pPr>
+            <a:r>
+              <a:rPr lang="ko-KR" sz="1400" b="0">
+                <a:solidFill>
+                  <a:srgbClr val="536C9C"/>
+                </a:solidFill>
+                <a:latin typeface="Arial"/>
+                <a:ea typeface="맑은 고딕"/>
+              </a:rPr>
+              <a:t>③ 현재 선택한 텍스트 상자</a:t>
+            </a:r>
+            <a:endParaRPr lang="ko-KR" sz="1400"/>
+          </a:p>
+          <a:p>
+            <a:pPr>
+              <a:lnSpc>
+                <a:spcPct val="120000"/>
+              </a:lnSpc>
+              <a:buNone/>
+            </a:pPr>
+            <a:r>
+              <a:rPr lang="ko-KR" sz="1400" b="0">
+                <a:solidFill>
+                  <a:srgbClr val="536C9C"/>
+                </a:solidFill>
+                <a:latin typeface="Arial"/>
+                <a:ea typeface="맑은 고딕"/>
+              </a:rPr>
+              <a:t>   → 텍스트에 맞게 높이 조정</a:t>
+            </a:r>
+            <a:endParaRPr lang="ko-KR" sz="1400"/>
+          </a:p>
+          <a:p>
+            <a:pPr>
+              <a:lnSpc>
+                <a:spcPct val="120000"/>
+              </a:lnSpc>
+              <a:buNone/>
+            </a:pPr>
+            <a:r>
+              <a:rPr lang="ko-KR" sz="1400" b="0">
+                <a:solidFill>
+                  <a:srgbClr val="536C9C"/>
+                </a:solidFill>
+                <a:latin typeface="Arial"/>
+                <a:ea typeface="맑은 고딕"/>
+              </a:rPr>
+              <a:t>④ 두 상자의 높이 변화 확인</a:t>
+            </a:r>
+            <a:endParaRPr lang="ko-KR" sz="1400"/>
+          </a:p>
+          <a:p>
+            <a:pPr>
+              <a:lnSpc>
+                <a:spcPct val="120000"/>
+              </a:lnSpc>
+              <a:buNone/>
+            </a:pPr>
+            <a:r>
+              <a:rPr lang="ko-KR" sz="1400" b="0">
+                <a:solidFill>
+                  <a:srgbClr val="536C9C"/>
+                </a:solidFill>
+                <a:latin typeface="Arial"/>
+                <a:ea typeface="맑은 고딕"/>
+              </a:rPr>
+              <a:t>⑤ 마지막 변경 취소</a:t>
+            </a:r>
+            <a:endParaRPr lang="ko-KR" sz="1400"/>
+          </a:p>
+          <a:p>
+            <a:pPr>
+              <a:lnSpc>
+                <a:spcPct val="120000"/>
+              </a:lnSpc>
+              <a:buNone/>
+            </a:pPr>
+            <a:r>
+              <a:rPr lang="ko-KR" sz="1400" b="0">
+                <a:solidFill>
+                  <a:srgbClr val="536C9C"/>
+                </a:solidFill>
+                <a:latin typeface="Arial"/>
+                <a:ea typeface="맑은 고딕"/>
+              </a:rPr>
+              <a:t>⑥ 적용 슬라이드의 모든</a:t>
+            </a:r>
+            <a:endParaRPr lang="ko-KR" sz="1400"/>
+          </a:p>
+          <a:p>
+            <a:pPr>
+              <a:lnSpc>
+                <a:spcPct val="120000"/>
+              </a:lnSpc>
+              <a:buNone/>
+            </a:pPr>
+            <a:r>
+              <a:rPr lang="ko-KR" sz="1400" b="0">
+                <a:solidFill>
+                  <a:srgbClr val="536C9C"/>
+                </a:solidFill>
+                <a:latin typeface="Arial"/>
+                <a:ea typeface="맑은 고딕"/>
+              </a:rPr>
+              <a:t>   텍스트 상자로 대상 변경</a:t>
+            </a:r>
+            <a:endParaRPr lang="ko-KR" sz="1400"/>
+          </a:p>
+          <a:p>
+            <a:pPr>
+              <a:lnSpc>
+                <a:spcPct val="120000"/>
+              </a:lnSpc>
+              <a:buNone/>
+            </a:pPr>
+            <a:r>
+              <a:rPr lang="ko-KR" sz="1400" b="0">
+                <a:solidFill>
+                  <a:srgbClr val="536C9C"/>
+                </a:solidFill>
+                <a:latin typeface="Arial"/>
+                <a:ea typeface="맑은 고딕"/>
+              </a:rPr>
+              <a:t>   → 높이 조정을 다시 실행</a:t>
+            </a:r>
+            <a:endParaRPr lang="ko-KR" sz="1400"/>
+          </a:p>
+          <a:p>
+            <a:pPr>
+              <a:lnSpc>
+                <a:spcPct val="120000"/>
+              </a:lnSpc>
+              <a:buNone/>
+            </a:pPr>
+            <a:r>
+              <a:rPr lang="ko-KR" sz="1400" b="0">
+                <a:solidFill>
+                  <a:srgbClr val="536C9C"/>
+                </a:solidFill>
+                <a:latin typeface="Arial"/>
+                <a:ea typeface="맑은 고딕"/>
+              </a:rPr>
+              <a:t>⑦ 제목·안내문도 함께 바뀜</a:t>
+            </a:r>
+            <a:endParaRPr lang="ko-KR" sz="1400"/>
+          </a:p>
+          <a:p>
+            <a:pPr>
+              <a:lnSpc>
+                <a:spcPct val="120000"/>
+              </a:lnSpc>
+              <a:buNone/>
+            </a:pPr>
+            <a:r>
+              <a:rPr lang="ko-KR" sz="1400" b="0">
+                <a:solidFill>
+                  <a:srgbClr val="536C9C"/>
+                </a:solidFill>
+                <a:latin typeface="Arial"/>
+                <a:ea typeface="맑은 고딕"/>
+              </a:rPr>
+              <a:t>   확인 후 실행 취소</a:t>
+            </a:r>
+            <a:endParaRPr lang="ko-KR" sz="1400"/>
+          </a:p>
+        </p:txBody>
+      </p:sp>
+      <p:sp>
+        <p:nvSpPr>
+          <p:cNvPr id="9" name="공통 도움말"/>
+          <p:cNvSpPr txBox="1"/>
+          <p:nvPr/>
+        </p:nvSpPr>
+        <p:spPr>
+          <a:xfrm>
+            <a:off x="720000" y="6282000"/>
+            <a:ext cx="10080000" cy="288000"/>
+          </a:xfrm>
+          <a:prstGeom prst="rect">
+            <a:avLst/>
+          </a:prstGeom>
+          <a:noFill/>
+          <a:ln>
+            <a:noFill/>
+          </a:ln>
+        </p:spPr>
+        <p:txBody>
+          <a:bodyPr wrap="square" lIns="54000" tIns="36000" rIns="54000" bIns="36000" anchor="t">
+            <a:noAutofit/>
+          </a:bodyPr>
+          <a:lstStyle/>
+          <a:p>
+            <a:pPr>
+              <a:lnSpc>
+                <a:spcPct val="120000"/>
+              </a:lnSpc>
+              <a:buNone/>
+            </a:pPr>
+            <a:r>
+              <a:rPr lang="ko-KR" sz="1100" b="0">
+                <a:solidFill>
+                  <a:srgbClr val="71809A"/>
+                </a:solidFill>
+                <a:latin typeface="Arial"/>
+                <a:ea typeface="맑은 고딕"/>
+              </a:rPr>
+              <a:t>시작: 왼쪽 번호로 현재 장만 적용 → 오른쪽 선택 결과에서 비우기</a:t>
+            </a:r>
+            <a:endParaRPr lang="ko-KR" sz="1100"/>
+          </a:p>
+        </p:txBody>
+      </p:sp>
+      <p:sp>
+        <p:nvSpPr>
+          <p:cNvPr id="10" name="페이지"/>
+          <p:cNvSpPr txBox="1"/>
+          <p:nvPr/>
+        </p:nvSpPr>
+        <p:spPr>
+          <a:xfrm>
+            <a:off x="11160000" y="6282000"/>
+            <a:ext cx="360000" cy="288000"/>
+          </a:xfrm>
+          <a:prstGeom prst="rect">
+            <a:avLst/>
+          </a:prstGeom>
+          <a:noFill/>
+          <a:ln>
+            <a:noFill/>
+          </a:ln>
+        </p:spPr>
+        <p:txBody>
+          <a:bodyPr wrap="square" lIns="54000" tIns="36000" rIns="54000" bIns="36000" anchor="t">
+            <a:noAutofit/>
+          </a:bodyPr>
+          <a:lstStyle/>
+          <a:p>
+            <a:pPr>
+              <a:lnSpc>
+                <a:spcPct val="120000"/>
+              </a:lnSpc>
+              <a:buNone/>
+            </a:pPr>
+            <a:r>
+              <a:rPr lang="ko-KR" sz="1200" b="0">
+                <a:solidFill>
+                  <a:srgbClr val="8390A7"/>
+                </a:solidFill>
+                <a:latin typeface="Arial"/>
+                <a:ea typeface="맑은 고딕"/>
+              </a:rPr>
+              <a:t>05</a:t>
+            </a:r>
+            <a:endParaRPr lang="ko-KR" sz="1200"/>
+          </a:p>
+        </p:txBody>
+      </p:sp>
+      <p:sp>
+        <p:nvSpPr>
+          <p:cNvPr id="11" name="짧은 상자 설명"/>
+          <p:cNvSpPr txBox="1"/>
+          <p:nvPr/>
+        </p:nvSpPr>
+        <p:spPr>
+          <a:xfrm>
+            <a:off x="720000" y="2232000"/>
+            <a:ext cx="6120000" cy="324000"/>
+          </a:xfrm>
+          <a:prstGeom prst="rect">
+            <a:avLst/>
+          </a:prstGeom>
+          <a:noFill/>
+          <a:ln>
+            <a:noFill/>
+          </a:ln>
+        </p:spPr>
+        <p:txBody>
+          <a:bodyPr wrap="square" lIns="54000" tIns="36000" rIns="54000" bIns="36000" anchor="t">
+            <a:noAutofit/>
+          </a:bodyPr>
+          <a:lstStyle/>
+          <a:p>
+            <a:pPr>
+              <a:lnSpc>
+                <a:spcPct val="120000"/>
+              </a:lnSpc>
+              <a:buNone/>
+            </a:pPr>
+            <a:r>
+              <a:rPr lang="ko-KR" sz="1500" b="1">
+                <a:solidFill>
+                  <a:srgbClr val="263346"/>
+                </a:solidFill>
+                <a:latin typeface="Arial"/>
+                <a:ea typeface="맑은 고딕"/>
+              </a:rPr>
+              <a:t>A. 높이가 부족한 상자</a:t>
+            </a:r>
+            <a:endParaRPr lang="ko-KR" sz="1500"/>
+          </a:p>
+        </p:txBody>
+      </p:sp>
+      <p:sp>
+        <p:nvSpPr>
+          <p:cNvPr id="12" name="높이실습 늘리기"/>
+          <p:cNvSpPr txBox="1"/>
+          <p:nvPr/>
+        </p:nvSpPr>
+        <p:spPr>
+          <a:xfrm>
+            <a:off x="720000" y="2700000"/>
+            <a:ext cx="5760000" cy="234000"/>
+          </a:xfrm>
+          <a:prstGeom prst="rect">
+            <a:avLst/>
+          </a:prstGeom>
+          <a:solidFill>
+            <a:srgbClr val="DCE7FF"/>
+          </a:solidFill>
+          <a:ln>
+            <a:noFill/>
+          </a:ln>
+        </p:spPr>
+        <p:txBody>
+          <a:bodyPr wrap="square" lIns="54000" tIns="36000" rIns="54000" bIns="36000" anchor="t">
+            <a:noAutofit/>
+          </a:bodyPr>
+          <a:lstStyle/>
+          <a:p>
+            <a:pPr>
+              <a:lnSpc>
+                <a:spcPct val="120000"/>
+              </a:lnSpc>
+              <a:buNone/>
+            </a:pPr>
+            <a:r>
+              <a:rPr lang="ko-KR" sz="1800" b="0">
+                <a:solidFill>
+                  <a:srgbClr val="263346"/>
+                </a:solidFill>
+                <a:latin typeface="Arial"/>
+                <a:ea typeface="맑은 고딕"/>
+              </a:rPr>
+              <a:t>프로젝트 진행 보고</a:t>
+            </a:r>
+            <a:endParaRPr lang="ko-KR" sz="1800"/>
+          </a:p>
+          <a:p>
+            <a:pPr>
+              <a:lnSpc>
+                <a:spcPct val="120000"/>
+              </a:lnSpc>
+              <a:buNone/>
+            </a:pPr>
+            <a:r>
+              <a:rPr lang="ko-KR" sz="1800" b="0">
+                <a:solidFill>
+                  <a:srgbClr val="263346"/>
+                </a:solidFill>
+                <a:latin typeface="Arial"/>
+                <a:ea typeface="맑은 고딕"/>
+              </a:rPr>
+              <a:t>설계와 구현을 마쳤습니다.</a:t>
+            </a:r>
+            <a:endParaRPr lang="ko-KR" sz="1800"/>
+          </a:p>
+          <a:p>
+            <a:pPr>
+              <a:lnSpc>
+                <a:spcPct val="120000"/>
+              </a:lnSpc>
+              <a:buNone/>
+            </a:pPr>
+            <a:r>
+              <a:rPr lang="ko-KR" sz="1800" b="0">
+                <a:solidFill>
+                  <a:srgbClr val="263346"/>
+                </a:solidFill>
+                <a:latin typeface="Arial"/>
+                <a:ea typeface="맑은 고딕"/>
+              </a:rPr>
+              <a:t>다음 단계는 사용자 검증입니다.</a:t>
+            </a:r>
+            <a:endParaRPr lang="ko-KR" sz="1800"/>
+          </a:p>
+        </p:txBody>
+      </p:sp>
+      <p:sp>
+        <p:nvSpPr>
+          <p:cNvPr id="13" name="큰 상자 설명"/>
+          <p:cNvSpPr txBox="1"/>
+          <p:nvPr/>
+        </p:nvSpPr>
+        <p:spPr>
+          <a:xfrm>
+            <a:off x="720000" y="3960000"/>
+            <a:ext cx="6120000" cy="324000"/>
+          </a:xfrm>
+          <a:prstGeom prst="rect">
+            <a:avLst/>
+          </a:prstGeom>
+          <a:noFill/>
+          <a:ln>
+            <a:noFill/>
+          </a:ln>
+        </p:spPr>
+        <p:txBody>
+          <a:bodyPr wrap="square" lIns="54000" tIns="36000" rIns="54000" bIns="36000" anchor="t">
+            <a:noAutofit/>
+          </a:bodyPr>
+          <a:lstStyle/>
+          <a:p>
+            <a:pPr>
+              <a:lnSpc>
+                <a:spcPct val="120000"/>
+              </a:lnSpc>
+              <a:buNone/>
+            </a:pPr>
+            <a:r>
+              <a:rPr lang="ko-KR" sz="1500" b="1">
+                <a:solidFill>
+                  <a:srgbClr val="263346"/>
+                </a:solidFill>
+                <a:latin typeface="Arial"/>
+                <a:ea typeface="맑은 고딕"/>
+              </a:rPr>
+              <a:t>B. 내용보다 큰 상자</a:t>
+            </a:r>
+            <a:endParaRPr lang="ko-KR" sz="1500"/>
+          </a:p>
+        </p:txBody>
+      </p:sp>
+      <p:sp>
+        <p:nvSpPr>
+          <p:cNvPr id="14" name="높이실습 줄이기"/>
+          <p:cNvSpPr txBox="1"/>
+          <p:nvPr/>
+        </p:nvSpPr>
+        <p:spPr>
+          <a:xfrm>
+            <a:off x="720000" y="4392000"/>
+            <a:ext cx="5760000" cy="1512000"/>
+          </a:xfrm>
+          <a:prstGeom prst="rect">
+            <a:avLst/>
+          </a:prstGeom>
+          <a:solidFill>
+            <a:srgbClr val="DCEFE8"/>
+          </a:solidFill>
+          <a:ln>
+            <a:noFill/>
+          </a:ln>
+        </p:spPr>
+        <p:txBody>
+          <a:bodyPr wrap="square" lIns="54000" tIns="36000" rIns="54000" bIns="36000" anchor="t">
+            <a:noAutofit/>
+          </a:bodyPr>
+          <a:lstStyle/>
+          <a:p>
+            <a:pPr>
+              <a:lnSpc>
+                <a:spcPct val="120000"/>
+              </a:lnSpc>
+              <a:buNone/>
+            </a:pPr>
+            <a:r>
+              <a:rPr lang="ko-KR" sz="1800" b="0">
+                <a:solidFill>
+                  <a:srgbClr val="263346"/>
+                </a:solidFill>
+                <a:latin typeface="Arial"/>
+                <a:ea typeface="맑은 고딕"/>
+              </a:rPr>
+              <a:t>검토 완료: 다음 단계로 진행합니다.</a:t>
+            </a:r>
+            <a:endParaRPr lang="ko-KR" sz="1800"/>
+          </a:p>
+        </p:txBody>
+      </p:sp>
+    </p:spTree>
+  </p:cSld>
+  <p:clrMapOvr>
+    <a:masterClrMapping/>
+  </p:clrMapOvr>
+</p:sld>
+</file>
+
+<file path=ppt/slides/slide6.xml><?xml version="1.0" encoding="utf-8"?>
+<p:sld xmlns:p="http://schemas.openxmlformats.org/presentationml/2006/main" xmlns:a="http://schemas.openxmlformats.org/drawingml/2006/main" xmlns:r="http://schemas.openxmlformats.org/officeDocument/2006/relationships">
+  <p:cSld name="안내선과 정밀 이동">
+    <p:bg>
+      <p:bgPr>
+        <a:solidFill>
+          <a:srgbClr val="F5F7FC"/>
+        </a:solidFill>
+        <a:effectLst/>
+      </p:bgPr>
+    </p:bg>
+    <p:spTree>
+      <p:nvGrpSpPr>
+        <p:cNvPr id="1" name=""/>
+        <p:cNvGrpSpPr/>
+        <p:nvPr/>
+      </p:nvGrpSpPr>
+      <p:grpSpPr/>
+      <p:sp>
+        <p:nvSpPr>
+          <p:cNvPr id="2" name="상단 띠"/>
+          <p:cNvSpPr txBox="0"/>
+          <p:nvPr/>
+        </p:nvSpPr>
+        <p:spPr>
+          <a:xfrm>
+            <a:off x="0" y="0"/>
+            <a:ext cx="12192012" cy="108000"/>
+          </a:xfrm>
+          <a:prstGeom prst="rect">
+            <a:avLst/>
+          </a:prstGeom>
+          <a:solidFill>
+            <a:srgbClr val="4268D6"/>
+          </a:solidFill>
+          <a:ln>
+            <a:noFill/>
+          </a:ln>
+        </p:spPr>
+      </p:sp>
+      <p:sp>
+        <p:nvSpPr>
+          <p:cNvPr id="3" name="단원"/>
+          <p:cNvSpPr txBox="1"/>
+          <p:nvPr/>
+        </p:nvSpPr>
+        <p:spPr>
+          <a:xfrm>
+            <a:off x="720000" y="360000"/>
+            <a:ext cx="10440000" cy="252000"/>
+          </a:xfrm>
+          <a:prstGeom prst="rect">
+            <a:avLst/>
+          </a:prstGeom>
+          <a:noFill/>
+          <a:ln>
+            <a:noFill/>
+          </a:ln>
+        </p:spPr>
+        <p:txBody>
+          <a:bodyPr wrap="square" lIns="54000" tIns="36000" rIns="54000" bIns="36000" anchor="t">
+            <a:noAutofit/>
+          </a:bodyPr>
+          <a:lstStyle/>
+          <a:p>
+            <a:pPr>
+              <a:lnSpc>
+                <a:spcPct val="120000"/>
+              </a:lnSpc>
+              <a:buNone/>
+            </a:pPr>
+            <a:r>
+              <a:rPr lang="ko-KR" sz="1100" b="0">
+                <a:solidFill>
+                  <a:srgbClr val="71809A"/>
+                </a:solidFill>
+                <a:latin typeface="Arial"/>
+                <a:ea typeface="맑은 고딕"/>
+              </a:rPr>
+              <a:t>SLIDE SYNC  /  PRACTICE</a:t>
+            </a:r>
+            <a:endParaRPr lang="ko-KR" sz="1100"/>
+          </a:p>
+        </p:txBody>
+      </p:sp>
+      <p:sp>
+        <p:nvSpPr>
+          <p:cNvPr id="4" name="Text 2"/>
+          <p:cNvSpPr txBox="1"/>
+          <p:nvPr/>
+        </p:nvSpPr>
+        <p:spPr>
+          <a:xfrm>
+            <a:off x="720000" y="828000"/>
+            <a:ext cx="10800000" cy="540000"/>
+          </a:xfrm>
+          <a:prstGeom prst="rect">
+            <a:avLst/>
+          </a:prstGeom>
+          <a:noFill/>
+          <a:ln>
+            <a:noFill/>
+          </a:ln>
+        </p:spPr>
+        <p:txBody>
+          <a:bodyPr wrap="square" lIns="54000" tIns="36000" rIns="54000" bIns="36000" anchor="t">
+            <a:noAutofit/>
+          </a:bodyPr>
+          <a:lstStyle/>
+          <a:p>
+            <a:pPr>
+              <a:lnSpc>
+                <a:spcPct val="120000"/>
+              </a:lnSpc>
+              <a:buNone/>
+            </a:pPr>
+            <a:r>
+              <a:rPr lang="ko-KR" sz="2800" b="1">
+                <a:solidFill>
+                  <a:srgbClr val="263346"/>
+                </a:solidFill>
+                <a:latin typeface="Arial"/>
+                <a:ea typeface="맑은 고딕"/>
+              </a:rPr>
+              <a:t>안내선과 정밀 이동</a:t>
+            </a:r>
+            <a:endParaRPr lang="ko-KR" sz="2800"/>
+          </a:p>
+        </p:txBody>
+      </p:sp>
+      <p:sp>
+        <p:nvSpPr>
+          <p:cNvPr id="5" name="부제"/>
+          <p:cNvSpPr txBox="1"/>
+          <p:nvPr/>
+        </p:nvSpPr>
+        <p:spPr>
+          <a:xfrm>
+            <a:off x="720000" y="1476000"/>
+            <a:ext cx="10800000" cy="432000"/>
+          </a:xfrm>
+          <a:prstGeom prst="rect">
+            <a:avLst/>
+          </a:prstGeom>
+          <a:noFill/>
+          <a:ln>
+            <a:noFill/>
+          </a:ln>
+        </p:spPr>
+        <p:txBody>
+          <a:bodyPr wrap="square" lIns="54000" tIns="36000" rIns="54000" bIns="36000" anchor="t">
+            <a:noAutofit/>
+          </a:bodyPr>
+          <a:lstStyle/>
+          <a:p>
+            <a:pPr>
+              <a:lnSpc>
+                <a:spcPct val="120000"/>
+              </a:lnSpc>
+              <a:buNone/>
+            </a:pPr>
+            <a:r>
+              <a:rPr lang="ko-KR" sz="1400" b="0">
+                <a:solidFill>
+                  <a:srgbClr val="67758D"/>
+                </a:solidFill>
+                <a:latin typeface="Arial"/>
+                <a:ea typeface="맑은 고딕"/>
+              </a:rPr>
+              <a:t>공통 안내선을 만들고, 카드의 경계나 중심을 맞춰 보세요.</a:t>
+            </a:r>
+            <a:endParaRPr lang="ko-KR" sz="1400"/>
+          </a:p>
+        </p:txBody>
+      </p:sp>
+      <p:sp>
+        <p:nvSpPr>
+          <p:cNvPr id="6" name="안내 패널"/>
+          <p:cNvSpPr txBox="0"/>
+          <p:nvPr/>
+        </p:nvSpPr>
+        <p:spPr>
+          <a:xfrm>
+            <a:off x="7308000" y="2160000"/>
+            <a:ext cx="4176000" cy="3888000"/>
+          </a:xfrm>
+          <a:prstGeom prst="rect">
+            <a:avLst/>
+          </a:prstGeom>
+          <a:solidFill>
+            <a:srgbClr val="E3EBFF"/>
+          </a:solidFill>
+          <a:ln>
+            <a:noFill/>
+          </a:ln>
+        </p:spPr>
+      </p:sp>
+      <p:sp>
+        <p:nvSpPr>
+          <p:cNvPr id="7" name="안내 제목"/>
+          <p:cNvSpPr txBox="1"/>
+          <p:nvPr/>
+        </p:nvSpPr>
+        <p:spPr>
+          <a:xfrm>
+            <a:off x="7560000" y="2376000"/>
+            <a:ext cx="3600000" cy="360000"/>
+          </a:xfrm>
+          <a:prstGeom prst="rect">
+            <a:avLst/>
+          </a:prstGeom>
+          <a:noFill/>
+          <a:ln>
+            <a:noFill/>
+          </a:ln>
+        </p:spPr>
+        <p:txBody>
+          <a:bodyPr wrap="square" lIns="54000" tIns="36000" rIns="54000" bIns="36000" anchor="t">
+            <a:noAutofit/>
+          </a:bodyPr>
+          <a:lstStyle/>
+          <a:p>
+            <a:pPr>
+              <a:lnSpc>
+                <a:spcPct val="120000"/>
+              </a:lnSpc>
+              <a:buNone/>
+            </a:pPr>
+            <a:r>
+              <a:rPr lang="ko-KR" sz="1800" b="1">
+                <a:solidFill>
+                  <a:srgbClr val="263346"/>
+                </a:solidFill>
+                <a:latin typeface="Arial"/>
+                <a:ea typeface="맑은 고딕"/>
+              </a:rPr>
+              <a:t>직접 해보기</a:t>
+            </a:r>
+            <a:endParaRPr lang="ko-KR" sz="1800"/>
+          </a:p>
+        </p:txBody>
+      </p:sp>
+      <p:sp>
+        <p:nvSpPr>
+          <p:cNvPr id="8" name="조작 안내"/>
+          <p:cNvSpPr txBox="1"/>
+          <p:nvPr/>
+        </p:nvSpPr>
+        <p:spPr>
+          <a:xfrm>
+            <a:off x="7560000" y="2844000"/>
+            <a:ext cx="3672000" cy="3060000"/>
+          </a:xfrm>
+          <a:prstGeom prst="rect">
+            <a:avLst/>
+          </a:prstGeom>
+          <a:noFill/>
+          <a:ln>
+            <a:noFill/>
+          </a:ln>
+        </p:spPr>
+        <p:txBody>
+          <a:bodyPr wrap="square" lIns="54000" tIns="36000" rIns="54000" bIns="36000" anchor="t">
+            <a:noAutofit/>
+          </a:bodyPr>
+          <a:lstStyle/>
+          <a:p>
+            <a:pPr>
+              <a:lnSpc>
+                <a:spcPct val="120000"/>
+              </a:lnSpc>
+              <a:buNone/>
+            </a:pPr>
+            <a:r>
+              <a:rPr lang="ko-KR" sz="1400" b="0">
+                <a:solidFill>
+                  <a:srgbClr val="536C9C"/>
+                </a:solidFill>
+                <a:latin typeface="Arial"/>
+                <a:ea typeface="맑은 고딕"/>
+              </a:rPr>
+              <a:t>① 안내선 펼치기 → 표시 켜기</a:t>
+            </a:r>
+            <a:endParaRPr lang="ko-KR" sz="1400"/>
+          </a:p>
+          <a:p>
+            <a:pPr>
+              <a:lnSpc>
+                <a:spcPct val="120000"/>
+              </a:lnSpc>
+              <a:buNone/>
+            </a:pPr>
+            <a:r>
+              <a:rPr lang="ko-KR" sz="1400" b="0">
+                <a:solidFill>
+                  <a:srgbClr val="536C9C"/>
+                </a:solidFill>
+                <a:latin typeface="Arial"/>
+                <a:ea typeface="맑은 고딕"/>
+              </a:rPr>
+              <a:t>② + 세로 안내선 → 위치 10</a:t>
+            </a:r>
+            <a:endParaRPr lang="ko-KR" sz="1400"/>
+          </a:p>
+          <a:p>
+            <a:pPr>
+              <a:lnSpc>
+                <a:spcPct val="120000"/>
+              </a:lnSpc>
+              <a:buNone/>
+            </a:pPr>
+            <a:r>
+              <a:rPr lang="ko-KR" sz="1400" b="0">
+                <a:solidFill>
+                  <a:srgbClr val="536C9C"/>
+                </a:solidFill>
+                <a:latin typeface="Arial"/>
+                <a:ea typeface="맑은 고딕"/>
+              </a:rPr>
+              <a:t>   → 적용 / 가로선은 위치 9</a:t>
+            </a:r>
+            <a:endParaRPr lang="ko-KR" sz="1400"/>
+          </a:p>
+          <a:p>
+            <a:pPr>
+              <a:lnSpc>
+                <a:spcPct val="120000"/>
+              </a:lnSpc>
+              <a:buNone/>
+            </a:pPr>
+            <a:r>
+              <a:rPr lang="ko-KR" sz="1400" b="0">
+                <a:solidFill>
+                  <a:srgbClr val="536C9C"/>
+                </a:solidFill>
+                <a:latin typeface="Arial"/>
+                <a:ea typeface="맑은 고딕"/>
+              </a:rPr>
+              <a:t>③ 이동할 때 안내선에 맞추기</a:t>
+            </a:r>
+            <a:endParaRPr lang="ko-KR" sz="1400"/>
+          </a:p>
+          <a:p>
+            <a:pPr>
+              <a:lnSpc>
+                <a:spcPct val="120000"/>
+              </a:lnSpc>
+              <a:buNone/>
+            </a:pPr>
+            <a:r>
+              <a:rPr lang="ko-KR" sz="1400" b="0">
+                <a:solidFill>
+                  <a:srgbClr val="536C9C"/>
+                </a:solidFill>
+                <a:latin typeface="Arial"/>
+                <a:ea typeface="맑은 고딕"/>
+              </a:rPr>
+              <a:t>   켜기 → 카드를 선 근처로 이동</a:t>
+            </a:r>
+            <a:endParaRPr lang="ko-KR" sz="1400"/>
+          </a:p>
+          <a:p>
+            <a:pPr>
+              <a:lnSpc>
+                <a:spcPct val="120000"/>
+              </a:lnSpc>
+              <a:buNone/>
+            </a:pPr>
+            <a:r>
+              <a:rPr lang="ko-KR" sz="1400" b="0">
+                <a:solidFill>
+                  <a:srgbClr val="536C9C"/>
+                </a:solidFill>
+                <a:latin typeface="Arial"/>
+                <a:ea typeface="맑은 고딕"/>
+              </a:rPr>
+              <a:t>④ Alt+드래그로 맞추기 해제</a:t>
+            </a:r>
+            <a:endParaRPr lang="ko-KR" sz="1400"/>
+          </a:p>
+          <a:p>
+            <a:pPr>
+              <a:lnSpc>
+                <a:spcPct val="120000"/>
+              </a:lnSpc>
+              <a:buNone/>
+            </a:pPr>
+            <a:r>
+              <a:rPr lang="ko-KR" sz="1400" b="0">
+                <a:solidFill>
+                  <a:srgbClr val="536C9C"/>
+                </a:solidFill>
+                <a:latin typeface="Arial"/>
+                <a:ea typeface="맑은 고딕"/>
+              </a:rPr>
+              <a:t>   Shift+드래그로 축 고정</a:t>
+            </a:r>
+            <a:endParaRPr lang="ko-KR" sz="1400"/>
+          </a:p>
+          <a:p>
+            <a:pPr>
+              <a:lnSpc>
+                <a:spcPct val="120000"/>
+              </a:lnSpc>
+              <a:buNone/>
+            </a:pPr>
+            <a:r>
+              <a:rPr lang="ko-KR" sz="1400" b="0">
+                <a:solidFill>
+                  <a:srgbClr val="536C9C"/>
+                </a:solidFill>
+                <a:latin typeface="Arial"/>
+                <a:ea typeface="맑은 고딕"/>
+              </a:rPr>
+              <a:t>⑤ 안내선을 드래그하여 편집</a:t>
+            </a:r>
+            <a:endParaRPr lang="ko-KR" sz="1400"/>
+          </a:p>
+          <a:p>
+            <a:pPr>
+              <a:lnSpc>
+                <a:spcPct val="120000"/>
+              </a:lnSpc>
+              <a:buNone/>
+            </a:pPr>
+            <a:r>
+              <a:rPr lang="ko-KR" sz="1400" b="0">
+                <a:solidFill>
+                  <a:srgbClr val="536C9C"/>
+                </a:solidFill>
+                <a:latin typeface="Arial"/>
+                <a:ea typeface="맑은 고딕"/>
+              </a:rPr>
+              <a:t>   켜기 → 선을 드래그</a:t>
+            </a:r>
+            <a:endParaRPr lang="ko-KR" sz="1400"/>
+          </a:p>
+          <a:p>
+            <a:pPr>
+              <a:lnSpc>
+                <a:spcPct val="120000"/>
+              </a:lnSpc>
+              <a:buNone/>
+            </a:pPr>
+            <a:r>
+              <a:rPr lang="ko-KR" sz="1400" b="0">
+                <a:solidFill>
+                  <a:srgbClr val="536C9C"/>
+                </a:solidFill>
+                <a:latin typeface="Arial"/>
+                <a:ea typeface="맑은 고딕"/>
+              </a:rPr>
+              <a:t>⑥ 선 선택 → 삭제 → 실행 취소</a:t>
+            </a:r>
+            <a:endParaRPr lang="ko-KR" sz="1400"/>
+          </a:p>
+          <a:p>
+            <a:pPr>
+              <a:lnSpc>
+                <a:spcPct val="120000"/>
+              </a:lnSpc>
+              <a:buNone/>
+            </a:pPr>
+            <a:r>
+              <a:rPr lang="ko-KR" sz="1400" b="0">
+                <a:solidFill>
+                  <a:srgbClr val="536C9C"/>
+                </a:solidFill>
+                <a:latin typeface="Arial"/>
+                <a:ea typeface="맑은 고딕"/>
+              </a:rPr>
+              <a:t>   표시 끄기/켜기도 확인</a:t>
+            </a:r>
+            <a:endParaRPr lang="ko-KR" sz="1400"/>
+          </a:p>
+        </p:txBody>
+      </p:sp>
+      <p:sp>
+        <p:nvSpPr>
+          <p:cNvPr id="9" name="공통 도움말"/>
+          <p:cNvSpPr txBox="1"/>
+          <p:nvPr/>
+        </p:nvSpPr>
+        <p:spPr>
+          <a:xfrm>
+            <a:off x="720000" y="6282000"/>
+            <a:ext cx="10080000" cy="288000"/>
+          </a:xfrm>
+          <a:prstGeom prst="rect">
+            <a:avLst/>
+          </a:prstGeom>
+          <a:noFill/>
+          <a:ln>
+            <a:noFill/>
+          </a:ln>
+        </p:spPr>
+        <p:txBody>
+          <a:bodyPr wrap="square" lIns="54000" tIns="36000" rIns="54000" bIns="36000" anchor="t">
+            <a:noAutofit/>
+          </a:bodyPr>
+          <a:lstStyle/>
+          <a:p>
+            <a:pPr>
+              <a:lnSpc>
+                <a:spcPct val="120000"/>
+              </a:lnSpc>
+              <a:buNone/>
+            </a:pPr>
+            <a:r>
+              <a:rPr lang="ko-KR" sz="1100" b="0">
+                <a:solidFill>
+                  <a:srgbClr val="71809A"/>
+                </a:solidFill>
+                <a:latin typeface="Arial"/>
+                <a:ea typeface="맑은 고딕"/>
+              </a:rPr>
+              <a:t>시작: 왼쪽 번호로 현재 장만 적용 → 오른쪽 선택 결과에서 비우기</a:t>
+            </a:r>
+            <a:endParaRPr lang="ko-KR" sz="1100"/>
+          </a:p>
+        </p:txBody>
+      </p:sp>
+      <p:sp>
+        <p:nvSpPr>
+          <p:cNvPr id="10" name="페이지"/>
+          <p:cNvSpPr txBox="1"/>
+          <p:nvPr/>
+        </p:nvSpPr>
+        <p:spPr>
+          <a:xfrm>
+            <a:off x="11160000" y="6282000"/>
+            <a:ext cx="360000" cy="288000"/>
+          </a:xfrm>
+          <a:prstGeom prst="rect">
+            <a:avLst/>
+          </a:prstGeom>
+          <a:noFill/>
+          <a:ln>
+            <a:noFill/>
+          </a:ln>
+        </p:spPr>
+        <p:txBody>
+          <a:bodyPr wrap="square" lIns="54000" tIns="36000" rIns="54000" bIns="36000" anchor="t">
+            <a:noAutofit/>
+          </a:bodyPr>
+          <a:lstStyle/>
+          <a:p>
+            <a:pPr>
+              <a:lnSpc>
+                <a:spcPct val="120000"/>
+              </a:lnSpc>
+              <a:buNone/>
+            </a:pPr>
+            <a:r>
+              <a:rPr lang="ko-KR" sz="1200" b="0">
+                <a:solidFill>
+                  <a:srgbClr val="8390A7"/>
+                </a:solidFill>
+                <a:latin typeface="Arial"/>
+                <a:ea typeface="맑은 고딕"/>
+              </a:rPr>
+              <a:t>06</a:t>
+            </a:r>
+            <a:endParaRPr lang="ko-KR" sz="1200"/>
+          </a:p>
+        </p:txBody>
+      </p:sp>
+      <p:sp>
+        <p:nvSpPr>
+          <p:cNvPr id="11" name="이동실습 카드"/>
+          <p:cNvSpPr txBox="1"/>
+          <p:nvPr/>
+        </p:nvSpPr>
+        <p:spPr>
+          <a:xfrm>
+            <a:off x="1080000" y="2880000"/>
+            <a:ext cx="3240000" cy="900000"/>
+          </a:xfrm>
+          <a:prstGeom prst="rect">
+            <a:avLst/>
+          </a:prstGeom>
+          <a:solidFill>
+            <a:srgbClr val="DCE7FF"/>
+          </a:solidFill>
+          <a:ln>
+            <a:noFill/>
+          </a:ln>
+        </p:spPr>
+        <p:txBody>
+          <a:bodyPr wrap="square" lIns="54000" tIns="36000" rIns="54000" bIns="36000" anchor="t">
+            <a:noAutofit/>
+          </a:bodyPr>
+          <a:lstStyle/>
+          <a:p>
+            <a:pPr>
+              <a:lnSpc>
+                <a:spcPct val="120000"/>
+              </a:lnSpc>
+              <a:buNone/>
+            </a:pPr>
+            <a:r>
+              <a:rPr lang="ko-KR" sz="1800" b="0">
+                <a:solidFill>
+                  <a:srgbClr val="263346"/>
+                </a:solidFill>
+                <a:latin typeface="Arial"/>
+                <a:ea typeface="맑은 고딕"/>
+              </a:rPr>
+              <a:t>나를 안내선에 맞추세요</a:t>
+            </a:r>
+            <a:endParaRPr lang="ko-KR" sz="1800"/>
+          </a:p>
+        </p:txBody>
+      </p:sp>
+      <p:sp>
+        <p:nvSpPr>
+          <p:cNvPr id="12" name="이동 보조 안내"/>
+          <p:cNvSpPr txBox="1"/>
+          <p:nvPr/>
+        </p:nvSpPr>
+        <p:spPr>
+          <a:xfrm>
+            <a:off x="720000" y="4320000"/>
+            <a:ext cx="6120000" cy="1440000"/>
+          </a:xfrm>
+          <a:prstGeom prst="rect">
+            <a:avLst/>
+          </a:prstGeom>
+          <a:noFill/>
+          <a:ln>
+            <a:noFill/>
+          </a:ln>
+        </p:spPr>
+        <p:txBody>
+          <a:bodyPr wrap="square" lIns="54000" tIns="36000" rIns="54000" bIns="36000" anchor="t">
+            <a:noAutofit/>
+          </a:bodyPr>
+          <a:lstStyle/>
+          <a:p>
+            <a:pPr>
+              <a:lnSpc>
+                <a:spcPct val="120000"/>
+              </a:lnSpc>
+              <a:buNone/>
+            </a:pPr>
+            <a:r>
+              <a:rPr lang="ko-KR" sz="1300" b="0">
+                <a:solidFill>
+                  <a:srgbClr val="536C9C"/>
+                </a:solidFill>
+                <a:latin typeface="Arial"/>
+                <a:ea typeface="맑은 고딕"/>
+              </a:rPr>
+              <a:t>숫자 이동: 카드 선택 → 모두 같은 위치로 맞추기</a:t>
+            </a:r>
+            <a:endParaRPr lang="ko-KR" sz="1300"/>
+          </a:p>
+          <a:p>
+            <a:pPr>
+              <a:lnSpc>
+                <a:spcPct val="120000"/>
+              </a:lnSpc>
+              <a:buNone/>
+            </a:pPr>
+            <a:r>
+              <a:rPr lang="ko-KR" sz="1300" b="0">
+                <a:solidFill>
+                  <a:srgbClr val="536C9C"/>
+                </a:solidFill>
+                <a:latin typeface="Arial"/>
+                <a:ea typeface="맑은 고딕"/>
+              </a:rPr>
+              <a:t>X 3 / Y 8 → 적용 후 같은 거리만큼 이동하기</a:t>
+            </a:r>
+            <a:endParaRPr lang="ko-KR" sz="1300"/>
+          </a:p>
+          <a:p>
+            <a:pPr>
+              <a:lnSpc>
+                <a:spcPct val="120000"/>
+              </a:lnSpc>
+              <a:buNone/>
+            </a:pPr>
+            <a:r>
+              <a:rPr lang="ko-KR" sz="1300" b="0">
+                <a:solidFill>
+                  <a:srgbClr val="536C9C"/>
+                </a:solidFill>
+                <a:latin typeface="Arial"/>
+                <a:ea typeface="맑은 고딕"/>
+              </a:rPr>
+              <a:t>X 1 / Y 0.5 → 이동. 방향키로 미세 이동도 체험.</a:t>
+            </a:r>
+            <a:endParaRPr lang="ko-KR" sz="1300"/>
+          </a:p>
+          <a:p>
+            <a:pPr>
+              <a:lnSpc>
+                <a:spcPct val="120000"/>
+              </a:lnSpc>
+              <a:buNone/>
+            </a:pPr>
+            <a:r>
+              <a:rPr lang="ko-KR" sz="1300" b="0">
+                <a:solidFill>
+                  <a:srgbClr val="536C9C"/>
+                </a:solidFill>
+                <a:latin typeface="Arial"/>
+                <a:ea typeface="맑은 고딕"/>
+              </a:rPr>
+              <a:t>공통 안내선은 전체 슬라이드와 저장 파일에 적용됩니다.</a:t>
+            </a:r>
+            <a:endParaRPr lang="ko-KR" sz="1300"/>
+          </a:p>
+        </p:txBody>
+      </p:sp>
+    </p:spTree>
+  </p:cSld>
+  <p:clrMapOvr>
+    <a:masterClrMapping/>
+  </p:clrMapOvr>
+</p:sld>
+</file>
+
+<file path=ppt/slides/slide7.xml><?xml version="1.0" encoding="utf-8"?>
+<p:sld xmlns:p="http://schemas.openxmlformats.org/presentationml/2006/main" xmlns:a="http://schemas.openxmlformats.org/drawingml/2006/main" xmlns:r="http://schemas.openxmlformats.org/officeDocument/2006/relationships">
+  <p:cSld name="그룹과 범위 선택">
+    <p:bg>
+      <p:bgPr>
+        <a:solidFill>
+          <a:srgbClr val="F5F7FC"/>
+        </a:solidFill>
+        <a:effectLst/>
+      </p:bgPr>
+    </p:bg>
+    <p:spTree>
+      <p:nvGrpSpPr>
+        <p:cNvPr id="1" name=""/>
+        <p:cNvGrpSpPr/>
+        <p:nvPr/>
+      </p:nvGrpSpPr>
+      <p:grpSpPr/>
+      <p:sp>
+        <p:nvSpPr>
+          <p:cNvPr id="2" name="상단 띠"/>
+          <p:cNvSpPr txBox="0"/>
+          <p:nvPr/>
+        </p:nvSpPr>
+        <p:spPr>
+          <a:xfrm>
+            <a:off x="0" y="0"/>
+            <a:ext cx="12192012" cy="108000"/>
+          </a:xfrm>
+          <a:prstGeom prst="rect">
+            <a:avLst/>
+          </a:prstGeom>
+          <a:solidFill>
+            <a:srgbClr val="4268D6"/>
+          </a:solidFill>
+          <a:ln>
+            <a:noFill/>
+          </a:ln>
+        </p:spPr>
+      </p:sp>
+      <p:sp>
+        <p:nvSpPr>
+          <p:cNvPr id="3" name="단원"/>
+          <p:cNvSpPr txBox="1"/>
+          <p:nvPr/>
+        </p:nvSpPr>
+        <p:spPr>
+          <a:xfrm>
+            <a:off x="720000" y="360000"/>
+            <a:ext cx="10440000" cy="252000"/>
+          </a:xfrm>
+          <a:prstGeom prst="rect">
+            <a:avLst/>
+          </a:prstGeom>
+          <a:noFill/>
+          <a:ln>
+            <a:noFill/>
+          </a:ln>
+        </p:spPr>
+        <p:txBody>
+          <a:bodyPr wrap="square" lIns="54000" tIns="36000" rIns="54000" bIns="36000" anchor="t">
+            <a:noAutofit/>
+          </a:bodyPr>
+          <a:lstStyle/>
+          <a:p>
+            <a:pPr>
+              <a:lnSpc>
+                <a:spcPct val="120000"/>
+              </a:lnSpc>
+              <a:buNone/>
+            </a:pPr>
+            <a:r>
+              <a:rPr lang="ko-KR" sz="1100" b="0">
+                <a:solidFill>
+                  <a:srgbClr val="71809A"/>
+                </a:solidFill>
+                <a:latin typeface="Arial"/>
+                <a:ea typeface="맑은 고딕"/>
+              </a:rPr>
+              <a:t>SLIDE SYNC  /  PRACTICE</a:t>
+            </a:r>
+            <a:endParaRPr lang="ko-KR" sz="1100"/>
+          </a:p>
+        </p:txBody>
+      </p:sp>
+      <p:sp>
+        <p:nvSpPr>
+          <p:cNvPr id="4" name="Text 2"/>
+          <p:cNvSpPr txBox="1"/>
+          <p:nvPr/>
+        </p:nvSpPr>
+        <p:spPr>
+          <a:xfrm>
+            <a:off x="720000" y="828000"/>
+            <a:ext cx="10800000" cy="540000"/>
+          </a:xfrm>
+          <a:prstGeom prst="rect">
+            <a:avLst/>
+          </a:prstGeom>
+          <a:noFill/>
+          <a:ln>
+            <a:noFill/>
+          </a:ln>
+        </p:spPr>
+        <p:txBody>
+          <a:bodyPr wrap="square" lIns="54000" tIns="36000" rIns="54000" bIns="36000" anchor="t">
+            <a:noAutofit/>
+          </a:bodyPr>
+          <a:lstStyle/>
+          <a:p>
+            <a:pPr>
+              <a:lnSpc>
+                <a:spcPct val="120000"/>
+              </a:lnSpc>
+              <a:buNone/>
+            </a:pPr>
+            <a:r>
+              <a:rPr lang="ko-KR" sz="2800" b="1">
+                <a:solidFill>
+                  <a:srgbClr val="263346"/>
+                </a:solidFill>
+                <a:latin typeface="Arial"/>
+                <a:ea typeface="맑은 고딕"/>
+              </a:rPr>
+              <a:t>그룹과 범위 선택</a:t>
+            </a:r>
+            <a:endParaRPr lang="ko-KR" sz="2800"/>
+          </a:p>
+        </p:txBody>
+      </p:sp>
+      <p:sp>
+        <p:nvSpPr>
+          <p:cNvPr id="5" name="부제"/>
+          <p:cNvSpPr txBox="1"/>
+          <p:nvPr/>
+        </p:nvSpPr>
+        <p:spPr>
+          <a:xfrm>
+            <a:off x="720000" y="1476000"/>
+            <a:ext cx="10800000" cy="432000"/>
+          </a:xfrm>
+          <a:prstGeom prst="rect">
+            <a:avLst/>
+          </a:prstGeom>
+          <a:noFill/>
+          <a:ln>
+            <a:noFill/>
+          </a:ln>
+        </p:spPr>
+        <p:txBody>
+          <a:bodyPr wrap="square" lIns="54000" tIns="36000" rIns="54000" bIns="36000" anchor="t">
+            <a:noAutofit/>
+          </a:bodyPr>
+          <a:lstStyle/>
+          <a:p>
+            <a:pPr>
+              <a:lnSpc>
+                <a:spcPct val="120000"/>
+              </a:lnSpc>
+              <a:buNone/>
+            </a:pPr>
+            <a:r>
+              <a:rPr lang="ko-KR" sz="1400" b="0">
+                <a:solidFill>
+                  <a:srgbClr val="67758D"/>
+                </a:solidFill>
+                <a:latin typeface="Arial"/>
+                <a:ea typeface="맑은 고딕"/>
+              </a:rPr>
+              <a:t>그룹은 하나로 움직이고, 여러 요소는 범위로 고를 수 있습니다.</a:t>
+            </a:r>
+            <a:endParaRPr lang="ko-KR" sz="1400"/>
+          </a:p>
+        </p:txBody>
+      </p:sp>
+      <p:sp>
+        <p:nvSpPr>
+          <p:cNvPr id="6" name="안내 패널"/>
+          <p:cNvSpPr txBox="0"/>
+          <p:nvPr/>
+        </p:nvSpPr>
+        <p:spPr>
+          <a:xfrm>
+            <a:off x="7308000" y="2160000"/>
+            <a:ext cx="4176000" cy="3888000"/>
+          </a:xfrm>
+          <a:prstGeom prst="rect">
+            <a:avLst/>
+          </a:prstGeom>
+          <a:solidFill>
+            <a:srgbClr val="E3EBFF"/>
+          </a:solidFill>
+          <a:ln>
+            <a:noFill/>
+          </a:ln>
+        </p:spPr>
+      </p:sp>
+      <p:sp>
+        <p:nvSpPr>
+          <p:cNvPr id="7" name="안내 제목"/>
+          <p:cNvSpPr txBox="1"/>
+          <p:nvPr/>
+        </p:nvSpPr>
+        <p:spPr>
+          <a:xfrm>
+            <a:off x="7560000" y="2376000"/>
+            <a:ext cx="3600000" cy="360000"/>
+          </a:xfrm>
+          <a:prstGeom prst="rect">
+            <a:avLst/>
+          </a:prstGeom>
+          <a:noFill/>
+          <a:ln>
+            <a:noFill/>
+          </a:ln>
+        </p:spPr>
+        <p:txBody>
+          <a:bodyPr wrap="square" lIns="54000" tIns="36000" rIns="54000" bIns="36000" anchor="t">
+            <a:noAutofit/>
+          </a:bodyPr>
+          <a:lstStyle/>
+          <a:p>
+            <a:pPr>
+              <a:lnSpc>
+                <a:spcPct val="120000"/>
+              </a:lnSpc>
+              <a:buNone/>
+            </a:pPr>
+            <a:r>
+              <a:rPr lang="ko-KR" sz="1800" b="1">
+                <a:solidFill>
+                  <a:srgbClr val="263346"/>
+                </a:solidFill>
+                <a:latin typeface="Arial"/>
+                <a:ea typeface="맑은 고딕"/>
+              </a:rPr>
+              <a:t>직접 해보기</a:t>
+            </a:r>
+            <a:endParaRPr lang="ko-KR" sz="1800"/>
+          </a:p>
+        </p:txBody>
+      </p:sp>
+      <p:sp>
+        <p:nvSpPr>
+          <p:cNvPr id="8" name="조작 안내"/>
+          <p:cNvSpPr txBox="1"/>
+          <p:nvPr/>
+        </p:nvSpPr>
+        <p:spPr>
+          <a:xfrm>
+            <a:off x="7560000" y="2844000"/>
+            <a:ext cx="3672000" cy="3060000"/>
+          </a:xfrm>
+          <a:prstGeom prst="rect">
+            <a:avLst/>
+          </a:prstGeom>
+          <a:noFill/>
+          <a:ln>
+            <a:noFill/>
+          </a:ln>
+        </p:spPr>
+        <p:txBody>
+          <a:bodyPr wrap="square" lIns="54000" tIns="36000" rIns="54000" bIns="36000" anchor="t">
+            <a:noAutofit/>
+          </a:bodyPr>
+          <a:lstStyle/>
+          <a:p>
+            <a:pPr>
+              <a:lnSpc>
+                <a:spcPct val="120000"/>
+              </a:lnSpc>
+              <a:buNone/>
+            </a:pPr>
+            <a:r>
+              <a:rPr lang="ko-KR" sz="1400" b="0">
+                <a:solidFill>
+                  <a:srgbClr val="536C9C"/>
+                </a:solidFill>
+                <a:latin typeface="Arial"/>
+                <a:ea typeface="맑은 고딕"/>
+              </a:rPr>
+              <a:t>① 실습 + 그룹 붙여 검색 → Enter</a:t>
+            </a:r>
+            <a:endParaRPr lang="ko-KR" sz="1400"/>
+          </a:p>
+          <a:p>
+            <a:pPr>
+              <a:lnSpc>
+                <a:spcPct val="120000"/>
+              </a:lnSpc>
+              <a:buNone/>
+            </a:pPr>
+            <a:r>
+              <a:rPr lang="ko-KR" sz="1400" b="0">
+                <a:solidFill>
+                  <a:srgbClr val="536C9C"/>
+                </a:solidFill>
+                <a:latin typeface="Arial"/>
+                <a:ea typeface="맑은 고딕"/>
+              </a:rPr>
+              <a:t>   그룹 전체가 선택되는지 확인</a:t>
+            </a:r>
+            <a:endParaRPr lang="ko-KR" sz="1400"/>
+          </a:p>
+          <a:p>
+            <a:pPr>
+              <a:lnSpc>
+                <a:spcPct val="120000"/>
+              </a:lnSpc>
+              <a:buNone/>
+            </a:pPr>
+            <a:r>
+              <a:rPr lang="ko-KR" sz="1400" b="0">
+                <a:solidFill>
+                  <a:srgbClr val="536C9C"/>
+                </a:solidFill>
+                <a:latin typeface="Arial"/>
+                <a:ea typeface="맑은 고딕"/>
+              </a:rPr>
+              <a:t>② 그룹을 드래그해 이동</a:t>
+            </a:r>
+            <a:endParaRPr lang="ko-KR" sz="1400"/>
+          </a:p>
+          <a:p>
+            <a:pPr>
+              <a:lnSpc>
+                <a:spcPct val="120000"/>
+              </a:lnSpc>
+              <a:buNone/>
+            </a:pPr>
+            <a:r>
+              <a:rPr lang="ko-KR" sz="1400" b="0">
+                <a:solidFill>
+                  <a:srgbClr val="536C9C"/>
+                </a:solidFill>
+                <a:latin typeface="Arial"/>
+                <a:ea typeface="맑은 고딕"/>
+              </a:rPr>
+              <a:t>   마지막 변경 취소로 복원</a:t>
+            </a:r>
+            <a:endParaRPr lang="ko-KR" sz="1400"/>
+          </a:p>
+          <a:p>
+            <a:pPr>
+              <a:lnSpc>
+                <a:spcPct val="120000"/>
+              </a:lnSpc>
+              <a:buNone/>
+            </a:pPr>
+            <a:r>
+              <a:rPr lang="ko-KR" sz="1400" b="0">
+                <a:solidFill>
+                  <a:srgbClr val="536C9C"/>
+                </a:solidFill>
+                <a:latin typeface="Arial"/>
+                <a:ea typeface="맑은 고딕"/>
+              </a:rPr>
+              <a:t>③ 비우기 → 빈 곳에서 드래그</a:t>
+            </a:r>
+            <a:endParaRPr lang="ko-KR" sz="1400"/>
+          </a:p>
+          <a:p>
+            <a:pPr>
+              <a:lnSpc>
+                <a:spcPct val="120000"/>
+              </a:lnSpc>
+              <a:buNone/>
+            </a:pPr>
+            <a:r>
+              <a:rPr lang="ko-KR" sz="1400" b="0">
+                <a:solidFill>
+                  <a:srgbClr val="536C9C"/>
+                </a:solidFill>
+                <a:latin typeface="Arial"/>
+                <a:ea typeface="맑은 고딕"/>
+              </a:rPr>
+              <a:t>   아래 작은 카드 둘을 감싸기</a:t>
+            </a:r>
+            <a:endParaRPr lang="ko-KR" sz="1400"/>
+          </a:p>
+          <a:p>
+            <a:pPr>
+              <a:lnSpc>
+                <a:spcPct val="120000"/>
+              </a:lnSpc>
+              <a:buNone/>
+            </a:pPr>
+            <a:r>
+              <a:rPr lang="ko-KR" sz="1400" b="0">
+                <a:solidFill>
+                  <a:srgbClr val="536C9C"/>
+                </a:solidFill>
+                <a:latin typeface="Arial"/>
+                <a:ea typeface="맑은 고딕"/>
+              </a:rPr>
+              <a:t>④ Ctrl·Shift·Cmd+클릭으로</a:t>
+            </a:r>
+            <a:endParaRPr lang="ko-KR" sz="1400"/>
+          </a:p>
+          <a:p>
+            <a:pPr>
+              <a:lnSpc>
+                <a:spcPct val="120000"/>
+              </a:lnSpc>
+              <a:buNone/>
+            </a:pPr>
+            <a:r>
+              <a:rPr lang="ko-KR" sz="1400" b="0">
+                <a:solidFill>
+                  <a:srgbClr val="536C9C"/>
+                </a:solidFill>
+                <a:latin typeface="Arial"/>
+                <a:ea typeface="맑은 고딕"/>
+              </a:rPr>
+              <a:t>   선택 추가/해제 → Esc로 비우기</a:t>
+            </a:r>
+            <a:endParaRPr lang="ko-KR" sz="1400"/>
+          </a:p>
+          <a:p>
+            <a:pPr>
+              <a:lnSpc>
+                <a:spcPct val="120000"/>
+              </a:lnSpc>
+              <a:buNone/>
+            </a:pPr>
+            <a:r>
+              <a:rPr lang="ko-KR" sz="1400" b="0">
+                <a:solidFill>
+                  <a:srgbClr val="536C9C"/>
+                </a:solidFill>
+                <a:latin typeface="Arial"/>
+                <a:ea typeface="맑은 고딕"/>
+              </a:rPr>
+              <a:t>⑤ 영역 선택 켜기 → 그룹 위에서</a:t>
+            </a:r>
+            <a:endParaRPr lang="ko-KR" sz="1400"/>
+          </a:p>
+          <a:p>
+            <a:pPr>
+              <a:lnSpc>
+                <a:spcPct val="120000"/>
+              </a:lnSpc>
+              <a:buNone/>
+            </a:pPr>
+            <a:r>
+              <a:rPr lang="ko-KR" sz="1400" b="0">
+                <a:solidFill>
+                  <a:srgbClr val="536C9C"/>
+                </a:solidFill>
+                <a:latin typeface="Arial"/>
+                <a:ea typeface="맑은 고딕"/>
+              </a:rPr>
+              <a:t>   범위를 그려 작은 카드 선택</a:t>
+            </a:r>
+            <a:endParaRPr lang="ko-KR" sz="1400"/>
+          </a:p>
+          <a:p>
+            <a:pPr>
+              <a:lnSpc>
+                <a:spcPct val="120000"/>
+              </a:lnSpc>
+              <a:buNone/>
+            </a:pPr>
+            <a:r>
+              <a:rPr lang="ko-KR" sz="1400" b="0">
+                <a:solidFill>
+                  <a:srgbClr val="536C9C"/>
+                </a:solidFill>
+                <a:latin typeface="Arial"/>
+                <a:ea typeface="맑은 고딕"/>
+              </a:rPr>
+              <a:t>⑥ 선택 결과 펼치기/접기</a:t>
+            </a:r>
+            <a:endParaRPr lang="ko-KR" sz="1400"/>
+          </a:p>
+          <a:p>
+            <a:pPr>
+              <a:lnSpc>
+                <a:spcPct val="120000"/>
+              </a:lnSpc>
+              <a:buNone/>
+            </a:pPr>
+            <a:r>
+              <a:rPr lang="ko-KR" sz="1400" b="0">
+                <a:solidFill>
+                  <a:srgbClr val="536C9C"/>
+                </a:solidFill>
+                <a:latin typeface="Arial"/>
+                <a:ea typeface="맑은 고딕"/>
+              </a:rPr>
+              <a:t>   카테고리 상태 유지 확인</a:t>
+            </a:r>
+            <a:endParaRPr lang="ko-KR" sz="1400"/>
+          </a:p>
+        </p:txBody>
+      </p:sp>
+      <p:sp>
+        <p:nvSpPr>
+          <p:cNvPr id="9" name="공통 도움말"/>
+          <p:cNvSpPr txBox="1"/>
+          <p:nvPr/>
+        </p:nvSpPr>
+        <p:spPr>
+          <a:xfrm>
+            <a:off x="720000" y="6282000"/>
+            <a:ext cx="10080000" cy="288000"/>
+          </a:xfrm>
+          <a:prstGeom prst="rect">
+            <a:avLst/>
+          </a:prstGeom>
+          <a:noFill/>
+          <a:ln>
+            <a:noFill/>
+          </a:ln>
+        </p:spPr>
+        <p:txBody>
+          <a:bodyPr wrap="square" lIns="54000" tIns="36000" rIns="54000" bIns="36000" anchor="t">
+            <a:noAutofit/>
+          </a:bodyPr>
+          <a:lstStyle/>
+          <a:p>
+            <a:pPr>
+              <a:lnSpc>
+                <a:spcPct val="120000"/>
+              </a:lnSpc>
+              <a:buNone/>
+            </a:pPr>
+            <a:r>
+              <a:rPr lang="ko-KR" sz="1100" b="0">
+                <a:solidFill>
+                  <a:srgbClr val="71809A"/>
+                </a:solidFill>
+                <a:latin typeface="Arial"/>
+                <a:ea typeface="맑은 고딕"/>
+              </a:rPr>
+              <a:t>시작: 왼쪽 번호로 현재 장만 적용 → 오른쪽 선택 결과에서 비우기</a:t>
+            </a:r>
+            <a:endParaRPr lang="ko-KR" sz="1100"/>
+          </a:p>
+        </p:txBody>
+      </p:sp>
+      <p:sp>
+        <p:nvSpPr>
+          <p:cNvPr id="10" name="페이지"/>
+          <p:cNvSpPr txBox="1"/>
+          <p:nvPr/>
+        </p:nvSpPr>
+        <p:spPr>
+          <a:xfrm>
+            <a:off x="11160000" y="6282000"/>
+            <a:ext cx="360000" cy="288000"/>
+          </a:xfrm>
+          <a:prstGeom prst="rect">
+            <a:avLst/>
+          </a:prstGeom>
+          <a:noFill/>
+          <a:ln>
+            <a:noFill/>
+          </a:ln>
+        </p:spPr>
+        <p:txBody>
+          <a:bodyPr wrap="square" lIns="54000" tIns="36000" rIns="54000" bIns="36000" anchor="t">
+            <a:noAutofit/>
+          </a:bodyPr>
+          <a:lstStyle/>
+          <a:p>
+            <a:pPr>
+              <a:lnSpc>
+                <a:spcPct val="120000"/>
+              </a:lnSpc>
+              <a:buNone/>
+            </a:pPr>
+            <a:r>
+              <a:rPr lang="ko-KR" sz="1200" b="0">
+                <a:solidFill>
+                  <a:srgbClr val="8390A7"/>
+                </a:solidFill>
+                <a:latin typeface="Arial"/>
+                <a:ea typeface="맑은 고딕"/>
+              </a:rPr>
+              <a:t>07</a:t>
+            </a:r>
+            <a:endParaRPr lang="ko-KR" sz="1200"/>
+          </a:p>
+        </p:txBody>
+      </p:sp>
+      <p:grpSp>
+        <p:nvGrpSpPr>
+          <p:cNvPr id="13" name="실습그룹"/>
+          <p:cNvGrpSpPr/>
+          <p:nvPr/>
+        </p:nvGrpSpPr>
+        <p:grpSpPr>
+          <a:xfrm>
+            <a:off x="720000" y="2520000"/>
+            <a:ext cx="5400000" cy="1080000"/>
+            <a:chOff x="720000" y="2520000"/>
+            <a:chExt cx="5400000" cy="1080000"/>
+          </a:xfrm>
+        </p:grpSpPr>
+        <p:sp>
+          <p:nvSpPr>
+            <p:cNvPr id="11" name="그룹 배경"/>
+            <p:cNvSpPr txBox="0"/>
+            <p:nvPr/>
+          </p:nvSpPr>
+          <p:spPr>
+            <a:xfrm>
+              <a:off x="720000" y="2520000"/>
+              <a:ext cx="5400000" cy="1080000"/>
+            </a:xfrm>
+            <a:prstGeom prst="rect">
+              <a:avLst/>
+            </a:prstGeom>
+            <a:solidFill>
+              <a:srgbClr val="DCE7FF"/>
+            </a:solidFill>
+            <a:ln>
+              <a:noFill/>
+            </a:ln>
+          </p:spPr>
+        </p:sp>
+        <p:sp>
+          <p:nvSpPr>
+            <p:cNvPr id="12" name="그룹 내부 검색어"/>
+            <p:cNvSpPr txBox="1"/>
+            <p:nvPr/>
+          </p:nvSpPr>
+          <p:spPr>
+            <a:xfrm>
+              <a:off x="1080000" y="2808000"/>
+              <a:ext cx="4680000" cy="432000"/>
+            </a:xfrm>
+            <a:prstGeom prst="rect">
+              <a:avLst/>
+            </a:prstGeom>
+            <a:noFill/>
+            <a:ln>
+              <a:noFill/>
+            </a:ln>
+          </p:spPr>
+          <p:txBody>
+            <a:bodyPr wrap="square" lIns="54000" tIns="36000" rIns="54000" bIns="36000" anchor="t">
+              <a:noAutofit/>
+            </a:bodyPr>
+            <a:lstStyle/>
+            <a:p>
+              <a:pPr>
+                <a:lnSpc>
+                  <a:spcPct val="120000"/>
+                </a:lnSpc>
+                <a:buNone/>
+              </a:pPr>
+              <a:r>
+                <a:rPr lang="ko-KR" sz="2000" b="1">
+                  <a:solidFill>
+                    <a:srgbClr val="263346"/>
+                  </a:solidFill>
+                  <a:latin typeface="Arial"/>
+                  <a:ea typeface="맑은 고딕"/>
+                </a:rPr>
+                <a:t>함께 이동하는 팀 카드</a:t>
+              </a:r>
+              <a:endParaRPr lang="ko-KR" sz="2000"/>
+            </a:p>
+          </p:txBody>
+        </p:sp>
+      </p:grpSp>
+      <p:sp>
+        <p:nvSpPr>
+          <p:cNvPr id="14" name="범위카드 1"/>
+          <p:cNvSpPr txBox="1"/>
+          <p:nvPr/>
+        </p:nvSpPr>
+        <p:spPr>
+          <a:xfrm>
+            <a:off x="1080000" y="4320000"/>
+            <a:ext cx="2160000" cy="720000"/>
+          </a:xfrm>
+          <a:prstGeom prst="rect">
+            <a:avLst/>
+          </a:prstGeom>
+          <a:solidFill>
+            <a:srgbClr val="DCEFE8"/>
+          </a:solidFill>
+          <a:ln>
+            <a:noFill/>
+          </a:ln>
+        </p:spPr>
+        <p:txBody>
+          <a:bodyPr wrap="square" lIns="54000" tIns="36000" rIns="54000" bIns="36000" anchor="t">
+            <a:noAutofit/>
+          </a:bodyPr>
+          <a:lstStyle/>
+          <a:p>
+            <a:pPr>
+              <a:lnSpc>
+                <a:spcPct val="120000"/>
+              </a:lnSpc>
+              <a:buNone/>
+            </a:pPr>
+            <a:r>
+              <a:rPr lang="ko-KR" sz="1800" b="0">
+                <a:solidFill>
+                  <a:srgbClr val="263346"/>
+                </a:solidFill>
+                <a:latin typeface="Arial"/>
+                <a:ea typeface="맑은 고딕"/>
+              </a:rPr>
+              <a:t>카드 A</a:t>
+            </a:r>
+            <a:endParaRPr lang="ko-KR" sz="1800"/>
+          </a:p>
+        </p:txBody>
+      </p:sp>
+      <p:sp>
+        <p:nvSpPr>
+          <p:cNvPr id="15" name="범위카드 2"/>
+          <p:cNvSpPr txBox="1"/>
+          <p:nvPr/>
+        </p:nvSpPr>
+        <p:spPr>
+          <a:xfrm>
+            <a:off x="3960000" y="4608000"/>
+            <a:ext cx="2160000" cy="720000"/>
+          </a:xfrm>
+          <a:prstGeom prst="rect">
+            <a:avLst/>
+          </a:prstGeom>
+          <a:solidFill>
+            <a:srgbClr val="FFE9C9"/>
+          </a:solidFill>
+          <a:ln>
+            <a:noFill/>
+          </a:ln>
+        </p:spPr>
+        <p:txBody>
+          <a:bodyPr wrap="square" lIns="54000" tIns="36000" rIns="54000" bIns="36000" anchor="t">
+            <a:noAutofit/>
+          </a:bodyPr>
+          <a:lstStyle/>
+          <a:p>
+            <a:pPr>
+              <a:lnSpc>
+                <a:spcPct val="120000"/>
+              </a:lnSpc>
+              <a:buNone/>
+            </a:pPr>
+            <a:r>
+              <a:rPr lang="ko-KR" sz="1800" b="0">
+                <a:solidFill>
+                  <a:srgbClr val="263346"/>
+                </a:solidFill>
+                <a:latin typeface="Arial"/>
+                <a:ea typeface="맑은 고딕"/>
+              </a:rPr>
+              <a:t>카드 B</a:t>
+            </a:r>
+            <a:endParaRPr lang="ko-KR" sz="1800"/>
+          </a:p>
+        </p:txBody>
+      </p:sp>
+    </p:spTree>
+  </p:cSld>
+  <p:clrMapOvr>
+    <a:masterClrMapping/>
+  </p:clrMapOvr>
+</p:sld>
+</file>
+
+<file path=ppt/slides/slide8.xml><?xml version="1.0" encoding="utf-8"?>
+<p:sld xmlns:p="http://schemas.openxmlformats.org/presentationml/2006/main" xmlns:a="http://schemas.openxmlformats.org/drawingml/2006/main" xmlns:r="http://schemas.openxmlformats.org/officeDocument/2006/relationships">
+  <p:cSld name="삭제·실행 취소·저장">
+    <p:bg>
+      <p:bgPr>
+        <a:solidFill>
+          <a:srgbClr val="F5F7FC"/>
+        </a:solidFill>
+        <a:effectLst/>
+      </p:bgPr>
+    </p:bg>
+    <p:spTree>
+      <p:nvGrpSpPr>
+        <p:cNvPr id="1" name=""/>
+        <p:cNvGrpSpPr/>
+        <p:nvPr/>
+      </p:nvGrpSpPr>
+      <p:grpSpPr/>
+      <p:sp>
+        <p:nvSpPr>
+          <p:cNvPr id="2" name="상단 띠"/>
+          <p:cNvSpPr txBox="0"/>
+          <p:nvPr/>
+        </p:nvSpPr>
+        <p:spPr>
+          <a:xfrm>
+            <a:off x="0" y="0"/>
+            <a:ext cx="12192012" cy="108000"/>
+          </a:xfrm>
+          <a:prstGeom prst="rect">
+            <a:avLst/>
+          </a:prstGeom>
+          <a:solidFill>
+            <a:srgbClr val="4268D6"/>
+          </a:solidFill>
+          <a:ln>
+            <a:noFill/>
+          </a:ln>
+        </p:spPr>
+      </p:sp>
+      <p:sp>
+        <p:nvSpPr>
+          <p:cNvPr id="3" name="단원"/>
+          <p:cNvSpPr txBox="1"/>
+          <p:nvPr/>
+        </p:nvSpPr>
+        <p:spPr>
+          <a:xfrm>
+            <a:off x="720000" y="360000"/>
+            <a:ext cx="10440000" cy="252000"/>
+          </a:xfrm>
+          <a:prstGeom prst="rect">
+            <a:avLst/>
+          </a:prstGeom>
+          <a:noFill/>
+          <a:ln>
+            <a:noFill/>
+          </a:ln>
+        </p:spPr>
+        <p:txBody>
+          <a:bodyPr wrap="square" lIns="54000" tIns="36000" rIns="54000" bIns="36000" anchor="t">
+            <a:noAutofit/>
+          </a:bodyPr>
+          <a:lstStyle/>
+          <a:p>
+            <a:pPr>
+              <a:lnSpc>
+                <a:spcPct val="120000"/>
+              </a:lnSpc>
+              <a:buNone/>
+            </a:pPr>
+            <a:r>
+              <a:rPr lang="ko-KR" sz="1100" b="0">
+                <a:solidFill>
+                  <a:srgbClr val="71809A"/>
+                </a:solidFill>
+                <a:latin typeface="Arial"/>
+                <a:ea typeface="맑은 고딕"/>
+              </a:rPr>
+              <a:t>SLIDE SYNC  /  PRACTICE</a:t>
+            </a:r>
+            <a:endParaRPr lang="ko-KR" sz="1100"/>
+          </a:p>
+        </p:txBody>
+      </p:sp>
+      <p:sp>
+        <p:nvSpPr>
+          <p:cNvPr id="4" name="Text 2"/>
+          <p:cNvSpPr txBox="1"/>
+          <p:nvPr/>
+        </p:nvSpPr>
+        <p:spPr>
+          <a:xfrm>
+            <a:off x="720000" y="828000"/>
+            <a:ext cx="10800000" cy="540000"/>
+          </a:xfrm>
+          <a:prstGeom prst="rect">
+            <a:avLst/>
+          </a:prstGeom>
+          <a:noFill/>
+          <a:ln>
+            <a:noFill/>
+          </a:ln>
+        </p:spPr>
+        <p:txBody>
+          <a:bodyPr wrap="square" lIns="54000" tIns="36000" rIns="54000" bIns="36000" anchor="t">
+            <a:noAutofit/>
+          </a:bodyPr>
+          <a:lstStyle/>
+          <a:p>
+            <a:pPr>
+              <a:lnSpc>
+                <a:spcPct val="120000"/>
+              </a:lnSpc>
+              <a:buNone/>
+            </a:pPr>
+            <a:r>
+              <a:rPr lang="ko-KR" sz="2800" b="1">
+                <a:solidFill>
+                  <a:srgbClr val="263346"/>
+                </a:solidFill>
+                <a:latin typeface="Arial"/>
+                <a:ea typeface="맑은 고딕"/>
+              </a:rPr>
+              <a:t>삭제·실행 취소·저장</a:t>
+            </a:r>
+            <a:endParaRPr lang="ko-KR" sz="2800"/>
+          </a:p>
+        </p:txBody>
+      </p:sp>
+      <p:sp>
+        <p:nvSpPr>
+          <p:cNvPr id="5" name="부제"/>
+          <p:cNvSpPr txBox="1"/>
+          <p:nvPr/>
+        </p:nvSpPr>
+        <p:spPr>
+          <a:xfrm>
+            <a:off x="720000" y="1476000"/>
+            <a:ext cx="10800000" cy="432000"/>
+          </a:xfrm>
+          <a:prstGeom prst="rect">
+            <a:avLst/>
+          </a:prstGeom>
+          <a:noFill/>
+          <a:ln>
+            <a:noFill/>
+          </a:ln>
+        </p:spPr>
+        <p:txBody>
+          <a:bodyPr wrap="square" lIns="54000" tIns="36000" rIns="54000" bIns="36000" anchor="t">
+            <a:noAutofit/>
+          </a:bodyPr>
+          <a:lstStyle/>
+          <a:p>
+            <a:pPr>
+              <a:lnSpc>
+                <a:spcPct val="120000"/>
+              </a:lnSpc>
+              <a:buNone/>
+            </a:pPr>
+            <a:r>
+              <a:rPr lang="ko-KR" sz="1400" b="0">
+                <a:solidFill>
+                  <a:srgbClr val="67758D"/>
+                </a:solidFill>
+                <a:latin typeface="Arial"/>
+                <a:ea typeface="맑은 고딕"/>
+              </a:rPr>
+              <a:t>불필요한 요소를 지운 뒤, 수정본을 내려받아 다시 열어 보세요.</a:t>
+            </a:r>
+            <a:endParaRPr lang="ko-KR" sz="1400"/>
+          </a:p>
+        </p:txBody>
+      </p:sp>
+      <p:sp>
+        <p:nvSpPr>
+          <p:cNvPr id="6" name="안내 패널"/>
+          <p:cNvSpPr txBox="0"/>
+          <p:nvPr/>
+        </p:nvSpPr>
+        <p:spPr>
+          <a:xfrm>
+            <a:off x="7308000" y="2160000"/>
+            <a:ext cx="4176000" cy="3888000"/>
+          </a:xfrm>
+          <a:prstGeom prst="rect">
+            <a:avLst/>
+          </a:prstGeom>
+          <a:solidFill>
+            <a:srgbClr val="E3EBFF"/>
+          </a:solidFill>
+          <a:ln>
+            <a:noFill/>
+          </a:ln>
+        </p:spPr>
+      </p:sp>
+      <p:sp>
+        <p:nvSpPr>
+          <p:cNvPr id="7" name="안내 제목"/>
+          <p:cNvSpPr txBox="1"/>
+          <p:nvPr/>
+        </p:nvSpPr>
+        <p:spPr>
+          <a:xfrm>
+            <a:off x="7560000" y="2376000"/>
+            <a:ext cx="3600000" cy="360000"/>
+          </a:xfrm>
+          <a:prstGeom prst="rect">
+            <a:avLst/>
+          </a:prstGeom>
+          <a:noFill/>
+          <a:ln>
+            <a:noFill/>
+          </a:ln>
+        </p:spPr>
+        <p:txBody>
+          <a:bodyPr wrap="square" lIns="54000" tIns="36000" rIns="54000" bIns="36000" anchor="t">
+            <a:noAutofit/>
+          </a:bodyPr>
+          <a:lstStyle/>
+          <a:p>
+            <a:pPr>
+              <a:lnSpc>
+                <a:spcPct val="120000"/>
+              </a:lnSpc>
+              <a:buNone/>
+            </a:pPr>
+            <a:r>
+              <a:rPr lang="ko-KR" sz="1800" b="1">
+                <a:solidFill>
+                  <a:srgbClr val="263346"/>
+                </a:solidFill>
+                <a:latin typeface="Arial"/>
+                <a:ea typeface="맑은 고딕"/>
+              </a:rPr>
+              <a:t>직접 해보기</a:t>
+            </a:r>
+            <a:endParaRPr lang="ko-KR" sz="1800"/>
+          </a:p>
+        </p:txBody>
+      </p:sp>
+      <p:sp>
+        <p:nvSpPr>
+          <p:cNvPr id="8" name="조작 안내"/>
+          <p:cNvSpPr txBox="1"/>
+          <p:nvPr/>
+        </p:nvSpPr>
+        <p:spPr>
+          <a:xfrm>
+            <a:off x="7560000" y="2844000"/>
+            <a:ext cx="3672000" cy="3060000"/>
+          </a:xfrm>
+          <a:prstGeom prst="rect">
+            <a:avLst/>
+          </a:prstGeom>
+          <a:noFill/>
+          <a:ln>
+            <a:noFill/>
+          </a:ln>
+        </p:spPr>
+        <p:txBody>
+          <a:bodyPr wrap="square" lIns="54000" tIns="36000" rIns="54000" bIns="36000" anchor="t">
+            <a:noAutofit/>
+          </a:bodyPr>
+          <a:lstStyle/>
+          <a:p>
+            <a:pPr>
+              <a:lnSpc>
+                <a:spcPct val="120000"/>
+              </a:lnSpc>
+              <a:buNone/>
+            </a:pPr>
+            <a:r>
+              <a:rPr lang="ko-KR" sz="1400" b="0">
+                <a:solidFill>
+                  <a:srgbClr val="536C9C"/>
+                </a:solidFill>
+                <a:latin typeface="Arial"/>
+                <a:ea typeface="맑은 고딕"/>
+              </a:rPr>
+              <a:t>① 삭제 + 실습 붙여 검색 → Enter</a:t>
+            </a:r>
+            <a:endParaRPr lang="ko-KR" sz="1400"/>
+          </a:p>
+          <a:p>
+            <a:pPr>
+              <a:lnSpc>
+                <a:spcPct val="120000"/>
+              </a:lnSpc>
+              <a:buNone/>
+            </a:pPr>
+            <a:r>
+              <a:rPr lang="ko-KR" sz="1400" b="0">
+                <a:solidFill>
+                  <a:srgbClr val="536C9C"/>
+                </a:solidFill>
+                <a:latin typeface="Arial"/>
+                <a:ea typeface="맑은 고딕"/>
+              </a:rPr>
+              <a:t>② 선택 요소 삭제 누르기</a:t>
+            </a:r>
+            <a:endParaRPr lang="ko-KR" sz="1400"/>
+          </a:p>
+          <a:p>
+            <a:pPr>
+              <a:lnSpc>
+                <a:spcPct val="120000"/>
+              </a:lnSpc>
+              <a:buNone/>
+            </a:pPr>
+            <a:r>
+              <a:rPr lang="ko-KR" sz="1400" b="0">
+                <a:solidFill>
+                  <a:srgbClr val="536C9C"/>
+                </a:solidFill>
+                <a:latin typeface="Arial"/>
+                <a:ea typeface="맑은 고딕"/>
+              </a:rPr>
+              <a:t>③ 마지막 변경 취소로 복원</a:t>
+            </a:r>
+            <a:endParaRPr lang="ko-KR" sz="1400"/>
+          </a:p>
+          <a:p>
+            <a:pPr>
+              <a:lnSpc>
+                <a:spcPct val="120000"/>
+              </a:lnSpc>
+              <a:buNone/>
+            </a:pPr>
+            <a:r>
+              <a:rPr lang="ko-KR" sz="1400" b="0">
+                <a:solidFill>
+                  <a:srgbClr val="536C9C"/>
+                </a:solidFill>
+                <a:latin typeface="Arial"/>
+                <a:ea typeface="맑은 고딕"/>
+              </a:rPr>
+              <a:t>④ Delete 또는 Backspace로 삭제</a:t>
+            </a:r>
+            <a:endParaRPr lang="ko-KR" sz="1400"/>
+          </a:p>
+          <a:p>
+            <a:pPr>
+              <a:lnSpc>
+                <a:spcPct val="120000"/>
+              </a:lnSpc>
+              <a:buNone/>
+            </a:pPr>
+            <a:r>
+              <a:rPr lang="ko-KR" sz="1400" b="0">
+                <a:solidFill>
+                  <a:srgbClr val="536C9C"/>
+                </a:solidFill>
+                <a:latin typeface="Arial"/>
+                <a:ea typeface="맑은 고딕"/>
+              </a:rPr>
+              <a:t>   Ctrl·Cmd+Z로 다시 복원</a:t>
+            </a:r>
+            <a:endParaRPr lang="ko-KR" sz="1400"/>
+          </a:p>
+          <a:p>
+            <a:pPr>
+              <a:lnSpc>
+                <a:spcPct val="120000"/>
+              </a:lnSpc>
+              <a:buNone/>
+            </a:pPr>
+            <a:r>
+              <a:rPr lang="ko-KR" sz="1400" b="0">
+                <a:solidFill>
+                  <a:srgbClr val="536C9C"/>
+                </a:solidFill>
+                <a:latin typeface="Arial"/>
+                <a:ea typeface="맑은 고딕"/>
+              </a:rPr>
+              <a:t>⑤ 수정본 다운로드 → 파일 저장</a:t>
+            </a:r>
+            <a:endParaRPr lang="ko-KR" sz="1400"/>
+          </a:p>
+          <a:p>
+            <a:pPr>
+              <a:lnSpc>
+                <a:spcPct val="120000"/>
+              </a:lnSpc>
+              <a:buNone/>
+            </a:pPr>
+            <a:r>
+              <a:rPr lang="ko-KR" sz="1400" b="0">
+                <a:solidFill>
+                  <a:srgbClr val="536C9C"/>
+                </a:solidFill>
+                <a:latin typeface="Arial"/>
+                <a:ea typeface="맑은 고딕"/>
+              </a:rPr>
+              <a:t>⑥ PPTX 열기 또는 파일 드롭으로</a:t>
+            </a:r>
+            <a:endParaRPr lang="ko-KR" sz="1400"/>
+          </a:p>
+          <a:p>
+            <a:pPr>
+              <a:lnSpc>
+                <a:spcPct val="120000"/>
+              </a:lnSpc>
+              <a:buNone/>
+            </a:pPr>
+            <a:r>
+              <a:rPr lang="ko-KR" sz="1400" b="0">
+                <a:solidFill>
+                  <a:srgbClr val="536C9C"/>
+                </a:solidFill>
+                <a:latin typeface="Arial"/>
+                <a:ea typeface="맑은 고딕"/>
+              </a:rPr>
+              <a:t>   저장한 수정본 다시 열기</a:t>
+            </a:r>
+            <a:endParaRPr lang="ko-KR" sz="1400"/>
+          </a:p>
+          <a:p>
+            <a:pPr>
+              <a:lnSpc>
+                <a:spcPct val="120000"/>
+              </a:lnSpc>
+              <a:buNone/>
+            </a:pPr>
+            <a:r>
+              <a:rPr lang="ko-KR" sz="1400" b="0">
+                <a:solidFill>
+                  <a:srgbClr val="536C9C"/>
+                </a:solidFill>
+                <a:latin typeface="Arial"/>
+                <a:ea typeface="맑은 고딕"/>
+              </a:rPr>
+              <a:t>⑦ 최근 PPTX → 보관 파일 열기</a:t>
+            </a:r>
+            <a:endParaRPr lang="ko-KR" sz="1400"/>
+          </a:p>
+          <a:p>
+            <a:pPr>
+              <a:lnSpc>
+                <a:spcPct val="120000"/>
+              </a:lnSpc>
+              <a:buNone/>
+            </a:pPr>
+            <a:r>
+              <a:rPr lang="ko-KR" sz="1400" b="0">
+                <a:solidFill>
+                  <a:srgbClr val="536C9C"/>
+                </a:solidFill>
+                <a:latin typeface="Arial"/>
+                <a:ea typeface="맑은 고딕"/>
+              </a:rPr>
+              <a:t>   불필요한 보관 항목 삭제 체험</a:t>
+            </a:r>
+            <a:endParaRPr lang="ko-KR" sz="1400"/>
+          </a:p>
+          <a:p>
+            <a:pPr>
+              <a:lnSpc>
+                <a:spcPct val="120000"/>
+              </a:lnSpc>
+              <a:buNone/>
+            </a:pPr>
+            <a:r>
+              <a:rPr lang="ko-KR" sz="1400" b="0">
+                <a:solidFill>
+                  <a:srgbClr val="536C9C"/>
+                </a:solidFill>
+                <a:latin typeface="Arial"/>
+                <a:ea typeface="맑은 고딕"/>
+              </a:rPr>
+              <a:t>※ 편집 내용은 자동 저장되지 않음</a:t>
+            </a:r>
+            <a:endParaRPr lang="ko-KR" sz="1400"/>
+          </a:p>
+        </p:txBody>
+      </p:sp>
+      <p:sp>
+        <p:nvSpPr>
+          <p:cNvPr id="9" name="공통 도움말"/>
+          <p:cNvSpPr txBox="1"/>
+          <p:nvPr/>
+        </p:nvSpPr>
+        <p:spPr>
+          <a:xfrm>
+            <a:off x="720000" y="6282000"/>
+            <a:ext cx="10080000" cy="288000"/>
+          </a:xfrm>
+          <a:prstGeom prst="rect">
+            <a:avLst/>
+          </a:prstGeom>
+          <a:noFill/>
+          <a:ln>
+            <a:noFill/>
+          </a:ln>
+        </p:spPr>
+        <p:txBody>
+          <a:bodyPr wrap="square" lIns="54000" tIns="36000" rIns="54000" bIns="36000" anchor="t">
+            <a:noAutofit/>
+          </a:bodyPr>
+          <a:lstStyle/>
+          <a:p>
+            <a:pPr>
+              <a:lnSpc>
+                <a:spcPct val="120000"/>
+              </a:lnSpc>
+              <a:buNone/>
+            </a:pPr>
+            <a:r>
+              <a:rPr lang="ko-KR" sz="1100" b="0">
+                <a:solidFill>
+                  <a:srgbClr val="71809A"/>
+                </a:solidFill>
+                <a:latin typeface="Arial"/>
+                <a:ea typeface="맑은 고딕"/>
+              </a:rPr>
+              <a:t>시작: 왼쪽 번호로 현재 장만 적용 → 오른쪽 선택 결과에서 비우기</a:t>
+            </a:r>
+            <a:endParaRPr lang="ko-KR" sz="1100"/>
+          </a:p>
+        </p:txBody>
+      </p:sp>
+      <p:sp>
+        <p:nvSpPr>
+          <p:cNvPr id="10" name="페이지"/>
+          <p:cNvSpPr txBox="1"/>
+          <p:nvPr/>
+        </p:nvSpPr>
+        <p:spPr>
+          <a:xfrm>
+            <a:off x="11160000" y="6282000"/>
+            <a:ext cx="360000" cy="288000"/>
+          </a:xfrm>
+          <a:prstGeom prst="rect">
+            <a:avLst/>
+          </a:prstGeom>
+          <a:noFill/>
+          <a:ln>
+            <a:noFill/>
+          </a:ln>
+        </p:spPr>
+        <p:txBody>
+          <a:bodyPr wrap="square" lIns="54000" tIns="36000" rIns="54000" bIns="36000" anchor="t">
+            <a:noAutofit/>
+          </a:bodyPr>
+          <a:lstStyle/>
+          <a:p>
+            <a:pPr>
+              <a:lnSpc>
+                <a:spcPct val="120000"/>
+              </a:lnSpc>
+              <a:buNone/>
+            </a:pPr>
+            <a:r>
+              <a:rPr lang="ko-KR" sz="1200" b="0">
+                <a:solidFill>
+                  <a:srgbClr val="8390A7"/>
+                </a:solidFill>
+                <a:latin typeface="Arial"/>
+                <a:ea typeface="맑은 고딕"/>
+              </a:rPr>
+              <a:t>08</a:t>
+            </a:r>
+            <a:endParaRPr lang="ko-KR" sz="1200"/>
+          </a:p>
+        </p:txBody>
+      </p:sp>
+      <p:sp>
+        <p:nvSpPr>
+          <p:cNvPr id="11" name="삭제실습 임시 배지"/>
+          <p:cNvSpPr txBox="1"/>
+          <p:nvPr/>
+        </p:nvSpPr>
+        <p:spPr>
+          <a:xfrm>
+            <a:off x="1080000" y="2520000"/>
+            <a:ext cx="4680000" cy="720000"/>
+          </a:xfrm>
+          <a:prstGeom prst="rect">
+            <a:avLst/>
+          </a:prstGeom>
+          <a:solidFill>
+            <a:srgbClr val="FFE0E0"/>
+          </a:solidFill>
+          <a:ln>
+            <a:noFill/>
+          </a:ln>
+        </p:spPr>
+        <p:txBody>
+          <a:bodyPr wrap="square" lIns="54000" tIns="36000" rIns="54000" bIns="36000" anchor="t">
+            <a:noAutofit/>
+          </a:bodyPr>
+          <a:lstStyle/>
+          <a:p>
+            <a:pPr>
+              <a:lnSpc>
+                <a:spcPct val="120000"/>
+              </a:lnSpc>
+              <a:buNone/>
+            </a:pPr>
+            <a:r>
+              <a:rPr lang="ko-KR" sz="2000" b="0">
+                <a:solidFill>
+                  <a:srgbClr val="263346"/>
+                </a:solidFill>
+                <a:latin typeface="Arial"/>
+                <a:ea typeface="맑은 고딕"/>
+              </a:rPr>
+              <a:t>삭제할 임시 배지</a:t>
+            </a:r>
+            <a:endParaRPr lang="ko-KR" sz="2000"/>
+          </a:p>
+        </p:txBody>
+      </p:sp>
+      <p:sp>
+        <p:nvSpPr>
+          <p:cNvPr id="12" name="최종 확인"/>
+          <p:cNvSpPr txBox="1"/>
+          <p:nvPr/>
+        </p:nvSpPr>
+        <p:spPr>
+          <a:xfrm>
+            <a:off x="720000" y="3960000"/>
+            <a:ext cx="6120000" cy="1800000"/>
+          </a:xfrm>
+          <a:prstGeom prst="rect">
+            <a:avLst/>
+          </a:prstGeom>
+          <a:noFill/>
+          <a:ln>
+            <a:noFill/>
+          </a:ln>
+        </p:spPr>
+        <p:txBody>
+          <a:bodyPr wrap="square" lIns="54000" tIns="36000" rIns="54000" bIns="36000" anchor="t">
+            <a:noAutofit/>
+          </a:bodyPr>
+          <a:lstStyle/>
+          <a:p>
+            <a:pPr>
+              <a:lnSpc>
+                <a:spcPct val="120000"/>
+              </a:lnSpc>
+              <a:buNone/>
+            </a:pPr>
+            <a:r>
+              <a:rPr lang="ko-KR" sz="1400" b="0">
+                <a:solidFill>
+                  <a:srgbClr val="536C9C"/>
+                </a:solidFill>
+                <a:latin typeface="Arial"/>
+                <a:ea typeface="맑은 고딕"/>
+              </a:rPr>
+              <a:t>마지막 확인</a:t>
+            </a:r>
+            <a:endParaRPr lang="ko-KR" sz="1400"/>
+          </a:p>
+          <a:p>
+            <a:pPr>
+              <a:lnSpc>
+                <a:spcPct val="120000"/>
+              </a:lnSpc>
+              <a:buNone/>
+            </a:pPr>
+            <a:r>
+              <a:rPr lang="ko-KR" sz="1400" b="0">
+                <a:solidFill>
+                  <a:srgbClr val="536C9C"/>
+                </a:solidFill>
+                <a:latin typeface="Arial"/>
+                <a:ea typeface="맑은 고딕"/>
+              </a:rPr>
+              <a:t>• 왼쪽 체크를 바꾸고 선택한 슬라이드만 보기</a:t>
+            </a:r>
+            <a:endParaRPr lang="ko-KR" sz="1400"/>
+          </a:p>
+          <a:p>
+            <a:pPr>
+              <a:lnSpc>
+                <a:spcPct val="120000"/>
+              </a:lnSpc>
+              <a:buNone/>
+            </a:pPr>
+            <a:r>
+              <a:rPr lang="ko-KR" sz="1400" b="0">
+                <a:solidFill>
+                  <a:srgbClr val="536C9C"/>
+                </a:solidFill>
+                <a:latin typeface="Arial"/>
+                <a:ea typeface="맑은 고딕"/>
+              </a:rPr>
+              <a:t>• 비활성 슬라이드 클릭으로 적용 대상에 추가</a:t>
+            </a:r>
+            <a:endParaRPr lang="ko-KR" sz="1400"/>
+          </a:p>
+          <a:p>
+            <a:pPr>
+              <a:lnSpc>
+                <a:spcPct val="120000"/>
+              </a:lnSpc>
+              <a:buNone/>
+            </a:pPr>
+            <a:r>
+              <a:rPr lang="ko-KR" sz="1400" b="0">
+                <a:solidFill>
+                  <a:srgbClr val="536C9C"/>
+                </a:solidFill>
+                <a:latin typeface="Arial"/>
+                <a:ea typeface="맑은 고딕"/>
+              </a:rPr>
+              <a:t>• 저장한 파일에 위치·높이·안내선·삭제 결과 확인</a:t>
+            </a:r>
+            <a:endParaRPr lang="ko-KR" sz="1400"/>
+          </a:p>
+          <a:p>
+            <a:pPr>
+              <a:lnSpc>
+                <a:spcPct val="120000"/>
+              </a:lnSpc>
+              <a:buNone/>
+            </a:pPr>
+            <a:r>
+              <a:rPr lang="ko-KR" sz="1400" b="0">
+                <a:solidFill>
+                  <a:srgbClr val="536C9C"/>
+                </a:solidFill>
+                <a:latin typeface="Arial"/>
+                <a:ea typeface="맑은 고딕"/>
+              </a:rPr>
+              <a:t>• 새 파일을 열면 선택과 실행 취소 기록은 초기화</a:t>
+            </a:r>
+            <a:endParaRPr lang="ko-KR" sz="1400"/>
           </a:p>
         </p:txBody>
       </p:sp>
